--- a/python-course-ppt/逐节课件/Python讲授课件-单元21.pptx
+++ b/python-course-ppt/逐节课件/Python讲授课件-单元21.pptx
@@ -327,6 +327,80 @@
           </a:p>
         </p:txBody>
       </p:sp>
+      <p:sp>
+        <p:nvSpPr>
+          <p:cNvPr id="2" name="讲课提示"/>
+          <p:cNvSpPr txBox="1"/>
+          <p:nvPr/>
+        </p:nvSpPr>
+        <p:spPr>
+          <a:xfrm>
+            <a:off x="457200" y="457200"/>
+            <a:ext cx="6858000" cy="4800600"/>
+          </a:xfrm>
+          <a:prstGeom prst="rect">
+            <a:avLst/>
+          </a:prstGeom>
+        </p:spPr>
+        <p:txBody>
+          <a:bodyPr wrap="square"/>
+          <a:lstStyle/>
+          <a:p>
+            <a:r>
+              <a:rPr lang="zh-CN" dirty="0"/>
+              <a:t>单元 21 · 单元 21 · 阶段 2 综合 + 关卡 2 验收</a:t>
+            </a:r>
+          </a:p>
+          <a:p>
+            <a:r>
+              <a:rPr lang="zh-CN" dirty="0"/>
+              <a:t/>
+            </a:r>
+          </a:p>
+          <a:p>
+            <a:r>
+              <a:rPr lang="zh-CN" dirty="0"/>
+              <a:t>本单元包含以下课节：</a:t>
+            </a:r>
+          </a:p>
+          <a:p>
+            <a:r>
+              <a:rPr lang="zh-CN" dirty="0"/>
+              <a:t>· 第 108 节 工程流程回顾与技术地图</a:t>
+            </a:r>
+          </a:p>
+          <a:p>
+            <a:r>
+              <a:rPr lang="zh-CN" dirty="0"/>
+              <a:t>· 第 109 节 能力跃迁与工程问题速查</a:t>
+            </a:r>
+          </a:p>
+          <a:p>
+            <a:r>
+              <a:rPr lang="zh-CN" dirty="0"/>
+              <a:t>· 第 110 节 ★ 关卡 2 五项逐条自测</a:t>
+            </a:r>
+          </a:p>
+          <a:p>
+            <a:r>
+              <a:rPr lang="zh-CN" dirty="0"/>
+              <a:t>· 第 111 节 综合项目与阶段 2 收尾</a:t>
+            </a:r>
+          </a:p>
+          <a:p>
+            <a:r>
+              <a:rPr lang="zh-CN" dirty="0"/>
+              <a:t/>
+            </a:r>
+          </a:p>
+          <a:p>
+            <a:r>
+              <a:rPr lang="zh-CN" dirty="0"/>
+              <a:t>开场用 3 分钟讲清：这个单元学完能做出什么，最后会被关卡怎么验。</a:t>
+            </a:r>
+          </a:p>
+        </p:txBody>
+      </p:sp>
     </p:spTree>
   </p:cSld>
   <p:clrMapOvr>
@@ -396,6 +470,50 @@
           </a:p>
         </p:txBody>
       </p:sp>
+      <p:sp>
+        <p:nvSpPr>
+          <p:cNvPr id="2" name="讲课提示"/>
+          <p:cNvSpPr txBox="1"/>
+          <p:nvPr/>
+        </p:nvSpPr>
+        <p:spPr>
+          <a:xfrm>
+            <a:off x="457200" y="457200"/>
+            <a:ext cx="6858000" cy="4800600"/>
+          </a:xfrm>
+          <a:prstGeom prst="rect">
+            <a:avLst/>
+          </a:prstGeom>
+        </p:spPr>
+        <p:txBody>
+          <a:bodyPr wrap="square"/>
+          <a:lstStyle/>
+          <a:p>
+            <a:r>
+              <a:rPr lang="zh-CN" dirty="0"/>
+              <a:t>单元 21 小结 · 单元 21 · 小结</a:t>
+            </a:r>
+          </a:p>
+          <a:p>
+            <a:r>
+              <a:rPr lang="zh-CN" dirty="0"/>
+              <a:t/>
+            </a:r>
+          </a:p>
+          <a:p>
+            <a:r>
+              <a:rPr lang="zh-CN" dirty="0"/>
+              <a:t>收尾动作：让学生合上讲义，口述本单元三个最重要的结论；说不出来的，回对应课节。</a:t>
+            </a:r>
+          </a:p>
+          <a:p>
+            <a:r>
+              <a:rPr lang="zh-CN" dirty="0"/>
+              <a:t>然后当场勾一遍本单元课节的「已完成」，没打勾的进下一单元前补掉。</a:t>
+            </a:r>
+          </a:p>
+        </p:txBody>
+      </p:sp>
     </p:spTree>
   </p:cSld>
   <p:clrMapOvr>
@@ -519,6 +637,104 @@
           </a:p>
         </p:txBody>
       </p:sp>
+      <p:sp>
+        <p:nvSpPr>
+          <p:cNvPr id="2" name="讲课提示"/>
+          <p:cNvSpPr txBox="1"/>
+          <p:nvPr/>
+        </p:nvSpPr>
+        <p:spPr>
+          <a:xfrm>
+            <a:off x="457200" y="457200"/>
+            <a:ext cx="6858000" cy="4800600"/>
+          </a:xfrm>
+          <a:prstGeom prst="rect">
+            <a:avLst/>
+          </a:prstGeom>
+        </p:spPr>
+        <p:txBody>
+          <a:bodyPr wrap="square"/>
+          <a:lstStyle/>
+          <a:p>
+            <a:r>
+              <a:rPr lang="zh-CN" dirty="0"/>
+              <a:t>第 108 节 · 工程流程回顾与技术地图</a:t>
+            </a:r>
+          </a:p>
+          <a:p>
+            <a:r>
+              <a:rPr lang="zh-CN" dirty="0"/>
+              <a:t>单元 21 · 阶段 2 综合 + 关卡 2 验收 · W28</a:t>
+            </a:r>
+          </a:p>
+          <a:p>
+            <a:r>
+              <a:rPr lang="zh-CN" dirty="0"/>
+              <a:t/>
+            </a:r>
+          </a:p>
+          <a:p>
+            <a:r>
+              <a:rPr lang="zh-CN" dirty="0"/>
+              <a:t>学习目标：掌握「读需求 → 拆解 → 查文档 → 编码 → 提交 → README → 重构」七步流程</a:t>
+            </a:r>
+          </a:p>
+          <a:p>
+            <a:r>
+              <a:rPr lang="zh-CN" dirty="0"/>
+              <a:t/>
+            </a:r>
+          </a:p>
+          <a:p>
+            <a:r>
+              <a:rPr lang="zh-CN" dirty="0"/>
+              <a:t>课堂实操（40 分钟，不看答案）：</a:t>
+            </a:r>
+          </a:p>
+          <a:p>
+            <a:r>
+              <a:rPr lang="zh-CN" dirty="0"/>
+              <a:t>· 用七步流程复盘自己这三个项目各走了哪几步</a:t>
+            </a:r>
+          </a:p>
+          <a:p>
+            <a:r>
+              <a:rPr lang="zh-CN" dirty="0"/>
+              <a:t>· 给一个需求现场拆成步骤清单</a:t>
+            </a:r>
+          </a:p>
+          <a:p>
+            <a:r>
+              <a:rPr lang="zh-CN" dirty="0"/>
+              <a:t/>
+            </a:r>
+          </a:p>
+          <a:p>
+            <a:r>
+              <a:rPr lang="zh-CN" dirty="0"/>
+              <a:t>课后作业：</a:t>
+            </a:r>
+          </a:p>
+          <a:p>
+            <a:r>
+              <a:rPr lang="zh-CN" dirty="0"/>
+              <a:t>· 产出：三项目的工程流程自查表</a:t>
+            </a:r>
+          </a:p>
+          <a:p>
+            <a:r>
+              <a:rPr lang="zh-CN" dirty="0"/>
+              <a:t/>
+            </a:r>
+          </a:p>
+          <a:p>
+            <a:r>
+              <a:rPr lang="zh-CN" dirty="0"/>
+              <a:t>节奏：讲 20 分钟 → 学员自己敲 40 分钟（不看答案）→ 对讲评自查 20 分钟 → 写作业 10 分钟。</a:t>
+            </a:r>
+          </a:p>
+        </p:txBody>
+      </p:sp>
     </p:spTree>
   </p:cSld>
   <p:clrMapOvr>
@@ -612,6 +828,74 @@
           </a:p>
         </p:txBody>
       </p:sp>
+      <p:sp>
+        <p:nvSpPr>
+          <p:cNvPr id="2" name="讲课提示"/>
+          <p:cNvSpPr txBox="1"/>
+          <p:nvPr/>
+        </p:nvSpPr>
+        <p:spPr>
+          <a:xfrm>
+            <a:off x="457200" y="457200"/>
+            <a:ext cx="6858000" cy="4800600"/>
+          </a:xfrm>
+          <a:prstGeom prst="rect">
+            <a:avLst/>
+          </a:prstGeom>
+        </p:spPr>
+        <p:txBody>
+          <a:bodyPr wrap="square"/>
+          <a:lstStyle/>
+          <a:p>
+            <a:r>
+              <a:rPr lang="zh-CN" dirty="0"/>
+              <a:t>第 108 节 · 核心知识点：工程流程回顾与技术地图</a:t>
+            </a:r>
+          </a:p>
+          <a:p>
+            <a:r>
+              <a:rPr lang="zh-CN" dirty="0"/>
+              <a:t/>
+            </a:r>
+          </a:p>
+          <a:p>
+            <a:r>
+              <a:rPr lang="zh-CN" dirty="0"/>
+              <a:t>讲这一页时：先让学生说出上节课的结论，再逐块讲要点。</a:t>
+            </a:r>
+          </a:p>
+          <a:p>
+            <a:r>
+              <a:rPr lang="zh-CN" dirty="0"/>
+              <a:t>每讲完一块，问一句「这一步如果写错了，报错会长什么样？」——把错误提前讲。</a:t>
+            </a:r>
+          </a:p>
+          <a:p>
+            <a:r>
+              <a:rPr lang="zh-CN" dirty="0"/>
+              <a:t/>
+            </a:r>
+          </a:p>
+          <a:p>
+            <a:r>
+              <a:rPr lang="zh-CN" dirty="0"/>
+              <a:t>本节目标：掌握「读需求 → 拆解 → 查文档 → 编码 → 提交 → README → 重构」七步流程</a:t>
+            </a:r>
+          </a:p>
+          <a:p>
+            <a:r>
+              <a:rPr lang="zh-CN" dirty="0"/>
+              <a:t/>
+            </a:r>
+          </a:p>
+          <a:p>
+            <a:r>
+              <a:rPr lang="zh-CN" dirty="0"/>
+              <a:t>看不到懂的地方，回讲义对应小节读一遍，再回来对着这页复述一次——能讲出来才算真懂。</a:t>
+            </a:r>
+          </a:p>
+        </p:txBody>
+      </p:sp>
     </p:spTree>
   </p:cSld>
   <p:clrMapOvr>
@@ -735,6 +1019,104 @@
           </a:p>
         </p:txBody>
       </p:sp>
+      <p:sp>
+        <p:nvSpPr>
+          <p:cNvPr id="2" name="讲课提示"/>
+          <p:cNvSpPr txBox="1"/>
+          <p:nvPr/>
+        </p:nvSpPr>
+        <p:spPr>
+          <a:xfrm>
+            <a:off x="457200" y="457200"/>
+            <a:ext cx="6858000" cy="4800600"/>
+          </a:xfrm>
+          <a:prstGeom prst="rect">
+            <a:avLst/>
+          </a:prstGeom>
+        </p:spPr>
+        <p:txBody>
+          <a:bodyPr wrap="square"/>
+          <a:lstStyle/>
+          <a:p>
+            <a:r>
+              <a:rPr lang="zh-CN" dirty="0"/>
+              <a:t>第 109 节 · 能力跃迁与工程问题速查</a:t>
+            </a:r>
+          </a:p>
+          <a:p>
+            <a:r>
+              <a:rPr lang="zh-CN" dirty="0"/>
+              <a:t>单元 21 · 阶段 2 综合 + 关卡 2 验收 · W28–W29</a:t>
+            </a:r>
+          </a:p>
+          <a:p>
+            <a:r>
+              <a:rPr lang="zh-CN" dirty="0"/>
+              <a:t/>
+            </a:r>
+          </a:p>
+          <a:p>
+            <a:r>
+              <a:rPr lang="zh-CN" dirty="0"/>
+              <a:t>学习目标：说清从脚本到项目的跃迁；会用 requirements.txt / .gitignore / 环境变量</a:t>
+            </a:r>
+          </a:p>
+          <a:p>
+            <a:r>
+              <a:rPr lang="zh-CN" dirty="0"/>
+              <a:t/>
+            </a:r>
+          </a:p>
+          <a:p>
+            <a:r>
+              <a:rPr lang="zh-CN" dirty="0"/>
+              <a:t>课堂实操（40 分钟，不看答案）：</a:t>
+            </a:r>
+          </a:p>
+          <a:p>
+            <a:r>
+              <a:rPr lang="zh-CN" dirty="0"/>
+              <a:t>· 给三个项目各跑一次「工程件体检」</a:t>
+            </a:r>
+          </a:p>
+          <a:p>
+            <a:r>
+              <a:rPr lang="zh-CN" dirty="0"/>
+              <a:t>· 把一个密钥从代码里挪到环境变量</a:t>
+            </a:r>
+          </a:p>
+          <a:p>
+            <a:r>
+              <a:rPr lang="zh-CN" dirty="0"/>
+              <a:t/>
+            </a:r>
+          </a:p>
+          <a:p>
+            <a:r>
+              <a:rPr lang="zh-CN" dirty="0"/>
+              <a:t>课后作业：</a:t>
+            </a:r>
+          </a:p>
+          <a:p>
+            <a:r>
+              <a:rPr lang="zh-CN" dirty="0"/>
+              <a:t>· 产出：三个项目的 README + requirements.txt</a:t>
+            </a:r>
+          </a:p>
+          <a:p>
+            <a:r>
+              <a:rPr lang="zh-CN" dirty="0"/>
+              <a:t/>
+            </a:r>
+          </a:p>
+          <a:p>
+            <a:r>
+              <a:rPr lang="zh-CN" dirty="0"/>
+              <a:t>节奏：讲 20 分钟 → 学员自己敲 40 分钟（不看答案）→ 对讲评自查 20 分钟 → 写作业 10 分钟。</a:t>
+            </a:r>
+          </a:p>
+        </p:txBody>
+      </p:sp>
     </p:spTree>
   </p:cSld>
   <p:clrMapOvr>
@@ -828,6 +1210,74 @@
           </a:p>
         </p:txBody>
       </p:sp>
+      <p:sp>
+        <p:nvSpPr>
+          <p:cNvPr id="2" name="讲课提示"/>
+          <p:cNvSpPr txBox="1"/>
+          <p:nvPr/>
+        </p:nvSpPr>
+        <p:spPr>
+          <a:xfrm>
+            <a:off x="457200" y="457200"/>
+            <a:ext cx="6858000" cy="4800600"/>
+          </a:xfrm>
+          <a:prstGeom prst="rect">
+            <a:avLst/>
+          </a:prstGeom>
+        </p:spPr>
+        <p:txBody>
+          <a:bodyPr wrap="square"/>
+          <a:lstStyle/>
+          <a:p>
+            <a:r>
+              <a:rPr lang="zh-CN" dirty="0"/>
+              <a:t>第 109 节 · 核心知识点：能力跃迁与工程问题速查</a:t>
+            </a:r>
+          </a:p>
+          <a:p>
+            <a:r>
+              <a:rPr lang="zh-CN" dirty="0"/>
+              <a:t/>
+            </a:r>
+          </a:p>
+          <a:p>
+            <a:r>
+              <a:rPr lang="zh-CN" dirty="0"/>
+              <a:t>讲这一页时：先让学生说出上节课的结论，再逐块讲要点。</a:t>
+            </a:r>
+          </a:p>
+          <a:p>
+            <a:r>
+              <a:rPr lang="zh-CN" dirty="0"/>
+              <a:t>每讲完一块，问一句「这一步如果写错了，报错会长什么样？」——把错误提前讲。</a:t>
+            </a:r>
+          </a:p>
+          <a:p>
+            <a:r>
+              <a:rPr lang="zh-CN" dirty="0"/>
+              <a:t/>
+            </a:r>
+          </a:p>
+          <a:p>
+            <a:r>
+              <a:rPr lang="zh-CN" dirty="0"/>
+              <a:t>本节目标：说清从脚本到项目的跃迁；会用 requirements.txt / .gitignore / 环境变量</a:t>
+            </a:r>
+          </a:p>
+          <a:p>
+            <a:r>
+              <a:rPr lang="zh-CN" dirty="0"/>
+              <a:t/>
+            </a:r>
+          </a:p>
+          <a:p>
+            <a:r>
+              <a:rPr lang="zh-CN" dirty="0"/>
+              <a:t>看不到懂的地方，回讲义对应小节读一遍，再回来对着这页复述一次——能讲出来才算真懂。</a:t>
+            </a:r>
+          </a:p>
+        </p:txBody>
+      </p:sp>
     </p:spTree>
   </p:cSld>
   <p:clrMapOvr>
@@ -951,6 +1401,104 @@
           </a:p>
         </p:txBody>
       </p:sp>
+      <p:sp>
+        <p:nvSpPr>
+          <p:cNvPr id="2" name="讲课提示"/>
+          <p:cNvSpPr txBox="1"/>
+          <p:nvPr/>
+        </p:nvSpPr>
+        <p:spPr>
+          <a:xfrm>
+            <a:off x="457200" y="457200"/>
+            <a:ext cx="6858000" cy="4800600"/>
+          </a:xfrm>
+          <a:prstGeom prst="rect">
+            <a:avLst/>
+          </a:prstGeom>
+        </p:spPr>
+        <p:txBody>
+          <a:bodyPr wrap="square"/>
+          <a:lstStyle/>
+          <a:p>
+            <a:r>
+              <a:rPr lang="zh-CN" dirty="0"/>
+              <a:t>第 110 节 · ★ 关卡 2 五项逐条自测</a:t>
+            </a:r>
+          </a:p>
+          <a:p>
+            <a:r>
+              <a:rPr lang="zh-CN" dirty="0"/>
+              <a:t>单元 21 · 阶段 2 综合 + 关卡 2 验收 · W29</a:t>
+            </a:r>
+          </a:p>
+          <a:p>
+            <a:r>
+              <a:rPr lang="zh-CN" dirty="0"/>
+              <a:t/>
+            </a:r>
+          </a:p>
+          <a:p>
+            <a:r>
+              <a:rPr lang="zh-CN" dirty="0"/>
+              <a:t>学习目标：限时自测五条硬指标，明确哪条没过、怎么补</a:t>
+            </a:r>
+          </a:p>
+          <a:p>
+            <a:r>
+              <a:rPr lang="zh-CN" dirty="0"/>
+              <a:t/>
+            </a:r>
+          </a:p>
+          <a:p>
+            <a:r>
+              <a:rPr lang="zh-CN" dirty="0"/>
+              <a:t>课堂实操（40 分钟，不看答案）：</a:t>
+            </a:r>
+          </a:p>
+          <a:p>
+            <a:r>
+              <a:rPr lang="zh-CN" dirty="0"/>
+              <a:t>· 逐条自测并记录结果</a:t>
+            </a:r>
+          </a:p>
+          <a:p>
+            <a:r>
+              <a:rPr lang="zh-CN" dirty="0"/>
+              <a:t>· 没过的项当场定补齐计划</a:t>
+            </a:r>
+          </a:p>
+          <a:p>
+            <a:r>
+              <a:rPr lang="zh-CN" dirty="0"/>
+              <a:t/>
+            </a:r>
+          </a:p>
+          <a:p>
+            <a:r>
+              <a:rPr lang="zh-CN" dirty="0"/>
+              <a:t>课后作业：</a:t>
+            </a:r>
+          </a:p>
+          <a:p>
+            <a:r>
+              <a:rPr lang="zh-CN" dirty="0"/>
+              <a:t>· ★ 关卡 2 五项逐条自测</a:t>
+            </a:r>
+          </a:p>
+          <a:p>
+            <a:r>
+              <a:rPr lang="zh-CN" dirty="0"/>
+              <a:t/>
+            </a:r>
+          </a:p>
+          <a:p>
+            <a:r>
+              <a:rPr lang="zh-CN" dirty="0"/>
+              <a:t>节奏：讲 20 分钟 → 学员自己敲 40 分钟（不看答案）→ 对讲评自查 20 分钟 → 写作业 10 分钟。</a:t>
+            </a:r>
+          </a:p>
+        </p:txBody>
+      </p:sp>
     </p:spTree>
   </p:cSld>
   <p:clrMapOvr>
@@ -1044,6 +1592,74 @@
           </a:p>
         </p:txBody>
       </p:sp>
+      <p:sp>
+        <p:nvSpPr>
+          <p:cNvPr id="2" name="讲课提示"/>
+          <p:cNvSpPr txBox="1"/>
+          <p:nvPr/>
+        </p:nvSpPr>
+        <p:spPr>
+          <a:xfrm>
+            <a:off x="457200" y="457200"/>
+            <a:ext cx="6858000" cy="4800600"/>
+          </a:xfrm>
+          <a:prstGeom prst="rect">
+            <a:avLst/>
+          </a:prstGeom>
+        </p:spPr>
+        <p:txBody>
+          <a:bodyPr wrap="square"/>
+          <a:lstStyle/>
+          <a:p>
+            <a:r>
+              <a:rPr lang="zh-CN" dirty="0"/>
+              <a:t>第 110 节 · 核心知识点：★ 关卡 2 五项逐条自测</a:t>
+            </a:r>
+          </a:p>
+          <a:p>
+            <a:r>
+              <a:rPr lang="zh-CN" dirty="0"/>
+              <a:t/>
+            </a:r>
+          </a:p>
+          <a:p>
+            <a:r>
+              <a:rPr lang="zh-CN" dirty="0"/>
+              <a:t>讲这一页时：先让学生说出上节课的结论，再逐块讲要点。</a:t>
+            </a:r>
+          </a:p>
+          <a:p>
+            <a:r>
+              <a:rPr lang="zh-CN" dirty="0"/>
+              <a:t>每讲完一块，问一句「这一步如果写错了，报错会长什么样？」——把错误提前讲。</a:t>
+            </a:r>
+          </a:p>
+          <a:p>
+            <a:r>
+              <a:rPr lang="zh-CN" dirty="0"/>
+              <a:t/>
+            </a:r>
+          </a:p>
+          <a:p>
+            <a:r>
+              <a:rPr lang="zh-CN" dirty="0"/>
+              <a:t>本节目标：限时自测五条硬指标，明确哪条没过、怎么补</a:t>
+            </a:r>
+          </a:p>
+          <a:p>
+            <a:r>
+              <a:rPr lang="zh-CN" dirty="0"/>
+              <a:t/>
+            </a:r>
+          </a:p>
+          <a:p>
+            <a:r>
+              <a:rPr lang="zh-CN" dirty="0"/>
+              <a:t>看不到懂的地方，回讲义对应小节读一遍，再回来对着这页复述一次——能讲出来才算真懂。</a:t>
+            </a:r>
+          </a:p>
+        </p:txBody>
+      </p:sp>
     </p:spTree>
   </p:cSld>
   <p:clrMapOvr>
@@ -1167,6 +1783,104 @@
           </a:p>
         </p:txBody>
       </p:sp>
+      <p:sp>
+        <p:nvSpPr>
+          <p:cNvPr id="2" name="讲课提示"/>
+          <p:cNvSpPr txBox="1"/>
+          <p:nvPr/>
+        </p:nvSpPr>
+        <p:spPr>
+          <a:xfrm>
+            <a:off x="457200" y="457200"/>
+            <a:ext cx="6858000" cy="4800600"/>
+          </a:xfrm>
+          <a:prstGeom prst="rect">
+            <a:avLst/>
+          </a:prstGeom>
+        </p:spPr>
+        <p:txBody>
+          <a:bodyPr wrap="square"/>
+          <a:lstStyle/>
+          <a:p>
+            <a:r>
+              <a:rPr lang="zh-CN" dirty="0"/>
+              <a:t>第 111 节 · 综合项目与阶段 2 收尾</a:t>
+            </a:r>
+          </a:p>
+          <a:p>
+            <a:r>
+              <a:rPr lang="zh-CN" dirty="0"/>
+              <a:t>单元 21 · 阶段 2 综合 + 关卡 2 验收 · W29</a:t>
+            </a:r>
+          </a:p>
+          <a:p>
+            <a:r>
+              <a:rPr lang="zh-CN" dirty="0"/>
+              <a:t/>
+            </a:r>
+          </a:p>
+          <a:p>
+            <a:r>
+              <a:rPr lang="zh-CN" dirty="0"/>
+              <a:t>学习目标：任选一个综合项目做完，形成阶段 2 的收尾产出</a:t>
+            </a:r>
+          </a:p>
+          <a:p>
+            <a:r>
+              <a:rPr lang="zh-CN" dirty="0"/>
+              <a:t/>
+            </a:r>
+          </a:p>
+          <a:p>
+            <a:r>
+              <a:rPr lang="zh-CN" dirty="0"/>
+              <a:t>课堂实操（40 分钟，不看答案）：</a:t>
+            </a:r>
+          </a:p>
+          <a:p>
+            <a:r>
+              <a:rPr lang="zh-CN" dirty="0"/>
+              <a:t>· 任选 A/B/C 之一定题并开工</a:t>
+            </a:r>
+          </a:p>
+          <a:p>
+            <a:r>
+              <a:rPr lang="zh-CN" dirty="0"/>
+              <a:t>· 对照统一要求自查四条</a:t>
+            </a:r>
+          </a:p>
+          <a:p>
+            <a:r>
+              <a:rPr lang="zh-CN" dirty="0"/>
+              <a:t/>
+            </a:r>
+          </a:p>
+          <a:p>
+            <a:r>
+              <a:rPr lang="zh-CN" dirty="0"/>
+              <a:t>课后作业：</a:t>
+            </a:r>
+          </a:p>
+          <a:p>
+            <a:r>
+              <a:rPr lang="zh-CN" dirty="0"/>
+              <a:t>· ★ 产出：一个可展示的综合项目 + 阶段 1 学习总结</a:t>
+            </a:r>
+          </a:p>
+          <a:p>
+            <a:r>
+              <a:rPr lang="zh-CN" dirty="0"/>
+              <a:t/>
+            </a:r>
+          </a:p>
+          <a:p>
+            <a:r>
+              <a:rPr lang="zh-CN" dirty="0"/>
+              <a:t>节奏：讲 20 分钟 → 学员自己敲 40 分钟（不看答案）→ 对讲评自查 20 分钟 → 写作业 10 分钟。</a:t>
+            </a:r>
+          </a:p>
+        </p:txBody>
+      </p:sp>
     </p:spTree>
   </p:cSld>
   <p:clrMapOvr>
@@ -1192,6 +1906,74 @@
           <a:chExt cx="0" cy="0"/>
         </a:xfrm>
       </p:grpSpPr>
+      <p:sp>
+        <p:nvSpPr>
+          <p:cNvPr id="2" name="讲课提示"/>
+          <p:cNvSpPr txBox="1"/>
+          <p:nvPr/>
+        </p:nvSpPr>
+        <p:spPr>
+          <a:xfrm>
+            <a:off x="457200" y="457200"/>
+            <a:ext cx="6858000" cy="4800600"/>
+          </a:xfrm>
+          <a:prstGeom prst="rect">
+            <a:avLst/>
+          </a:prstGeom>
+        </p:spPr>
+        <p:txBody>
+          <a:bodyPr wrap="square"/>
+          <a:lstStyle/>
+          <a:p>
+            <a:r>
+              <a:rPr lang="zh-CN" dirty="0"/>
+              <a:t>第 111 节 · 核心知识点：综合项目与阶段 2 收尾</a:t>
+            </a:r>
+          </a:p>
+          <a:p>
+            <a:r>
+              <a:rPr lang="zh-CN" dirty="0"/>
+              <a:t/>
+            </a:r>
+          </a:p>
+          <a:p>
+            <a:r>
+              <a:rPr lang="zh-CN" dirty="0"/>
+              <a:t>讲这一页时：先让学生说出上节课的结论，再逐块讲要点。</a:t>
+            </a:r>
+          </a:p>
+          <a:p>
+            <a:r>
+              <a:rPr lang="zh-CN" dirty="0"/>
+              <a:t>每讲完一块，问一句「这一步如果写错了，报错会长什么样？」——把错误提前讲。</a:t>
+            </a:r>
+          </a:p>
+          <a:p>
+            <a:r>
+              <a:rPr lang="zh-CN" dirty="0"/>
+              <a:t/>
+            </a:r>
+          </a:p>
+          <a:p>
+            <a:r>
+              <a:rPr lang="zh-CN" dirty="0"/>
+              <a:t>本节目标：任选一个综合项目做完，形成阶段 2 的收尾产出</a:t>
+            </a:r>
+          </a:p>
+          <a:p>
+            <a:r>
+              <a:rPr lang="zh-CN" dirty="0"/>
+              <a:t/>
+            </a:r>
+          </a:p>
+          <a:p>
+            <a:r>
+              <a:rPr lang="zh-CN" dirty="0"/>
+              <a:t>看不到懂的地方，回讲义对应小节读一遍，再回来对着这页复述一次——能讲出来才算真懂。</a:t>
+            </a:r>
+          </a:p>
+        </p:txBody>
+      </p:sp>
       <p:sp>
         <p:nvSpPr>
           <p:cNvPr id="2" name="讲课提示"/>

--- a/python-course-ppt/逐节课件/Python讲授课件-单元21.pptx
+++ b/python-course-ppt/逐节课件/Python讲授课件-单元21.pptx
@@ -236,1820 +236,6 @@
 </p:notesMaster>
 </file>
 
-<file path=ppt/notesSlides/notesSlide1.xml><?xml version="1.0" encoding="utf-8"?>
-<p:notes xmlns:a="http://schemas.openxmlformats.org/drawingml/2006/main" xmlns:p="http://schemas.openxmlformats.org/presentationml/2006/main" xmlns:r="http://schemas.openxmlformats.org/officeDocument/2006/relationships">
-  <p:cSld>
-    <p:spTree>
-      <p:nvGrpSpPr>
-        <p:cNvPr id="1" name=""/>
-        <p:cNvGrpSpPr/>
-        <p:nvPr/>
-      </p:nvGrpSpPr>
-      <p:grpSpPr>
-        <a:xfrm>
-          <a:off x="0" y="0"/>
-          <a:ext cx="0" cy="0"/>
-          <a:chOff x="0" y="0"/>
-          <a:chExt cx="0" cy="0"/>
-        </a:xfrm>
-      </p:grpSpPr>
-      <p:sp>
-        <p:nvSpPr>
-          <p:cNvPr id="2" name="讲课提示"/>
-          <p:cNvSpPr txBox="1"/>
-          <p:nvPr/>
-        </p:nvSpPr>
-        <p:spPr>
-          <a:xfrm>
-            <a:off x="457200" y="457200"/>
-            <a:ext cx="6858000" cy="4800600"/>
-          </a:xfrm>
-          <a:prstGeom prst="rect">
-            <a:avLst/>
-          </a:prstGeom>
-        </p:spPr>
-        <p:txBody>
-          <a:bodyPr wrap="square"/>
-          <a:lstStyle/>
-          <a:p>
-            <a:r>
-              <a:rPr lang="zh-CN" dirty="0"/>
-              <a:t>单元 21 · 单元 21 · 阶段 2 综合 + 关卡 2 验收</a:t>
-            </a:r>
-          </a:p>
-          <a:p>
-            <a:r>
-              <a:rPr lang="zh-CN" dirty="0"/>
-              <a:t/>
-            </a:r>
-          </a:p>
-          <a:p>
-            <a:r>
-              <a:rPr lang="zh-CN" dirty="0"/>
-              <a:t>本单元包含以下课节：</a:t>
-            </a:r>
-          </a:p>
-          <a:p>
-            <a:r>
-              <a:rPr lang="zh-CN" dirty="0"/>
-              <a:t>· 第 108 节 工程流程回顾与技术地图</a:t>
-            </a:r>
-          </a:p>
-          <a:p>
-            <a:r>
-              <a:rPr lang="zh-CN" dirty="0"/>
-              <a:t>· 第 109 节 能力跃迁与工程问题速查</a:t>
-            </a:r>
-          </a:p>
-          <a:p>
-            <a:r>
-              <a:rPr lang="zh-CN" dirty="0"/>
-              <a:t>· 第 110 节 ★ 关卡 2 五项逐条自测</a:t>
-            </a:r>
-          </a:p>
-          <a:p>
-            <a:r>
-              <a:rPr lang="zh-CN" dirty="0"/>
-              <a:t>· 第 111 节 综合项目与阶段 2 收尾</a:t>
-            </a:r>
-          </a:p>
-          <a:p>
-            <a:r>
-              <a:rPr lang="zh-CN" dirty="0"/>
-              <a:t/>
-            </a:r>
-          </a:p>
-          <a:p>
-            <a:r>
-              <a:rPr lang="zh-CN" dirty="0"/>
-              <a:t>开场用 3 分钟讲清：这个单元学完能做出什么，最后会被关卡怎么验。</a:t>
-            </a:r>
-          </a:p>
-        </p:txBody>
-      </p:sp>
-      <p:sp>
-        <p:nvSpPr>
-          <p:cNvPr id="2" name="讲课提示"/>
-          <p:cNvSpPr txBox="1"/>
-          <p:nvPr/>
-        </p:nvSpPr>
-        <p:spPr>
-          <a:xfrm>
-            <a:off x="457200" y="457200"/>
-            <a:ext cx="6858000" cy="4800600"/>
-          </a:xfrm>
-          <a:prstGeom prst="rect">
-            <a:avLst/>
-          </a:prstGeom>
-        </p:spPr>
-        <p:txBody>
-          <a:bodyPr wrap="square"/>
-          <a:lstStyle/>
-          <a:p>
-            <a:r>
-              <a:rPr lang="zh-CN" dirty="0"/>
-              <a:t>单元 21 · 单元 21 · 阶段 2 综合 + 关卡 2 验收</a:t>
-            </a:r>
-          </a:p>
-          <a:p>
-            <a:r>
-              <a:rPr lang="zh-CN" dirty="0"/>
-              <a:t/>
-            </a:r>
-          </a:p>
-          <a:p>
-            <a:r>
-              <a:rPr lang="zh-CN" dirty="0"/>
-              <a:t>本单元包含以下课节：</a:t>
-            </a:r>
-          </a:p>
-          <a:p>
-            <a:r>
-              <a:rPr lang="zh-CN" dirty="0"/>
-              <a:t>· 第 108 节 工程流程回顾与技术地图</a:t>
-            </a:r>
-          </a:p>
-          <a:p>
-            <a:r>
-              <a:rPr lang="zh-CN" dirty="0"/>
-              <a:t>· 第 109 节 能力跃迁与工程问题速查</a:t>
-            </a:r>
-          </a:p>
-          <a:p>
-            <a:r>
-              <a:rPr lang="zh-CN" dirty="0"/>
-              <a:t>· 第 110 节 ★ 关卡 2 五项逐条自测</a:t>
-            </a:r>
-          </a:p>
-          <a:p>
-            <a:r>
-              <a:rPr lang="zh-CN" dirty="0"/>
-              <a:t>· 第 111 节 综合项目与阶段 2 收尾</a:t>
-            </a:r>
-          </a:p>
-          <a:p>
-            <a:r>
-              <a:rPr lang="zh-CN" dirty="0"/>
-              <a:t/>
-            </a:r>
-          </a:p>
-          <a:p>
-            <a:r>
-              <a:rPr lang="zh-CN" dirty="0"/>
-              <a:t>开场用 3 分钟讲清：这个单元学完能做出什么，最后会被关卡怎么验。</a:t>
-            </a:r>
-          </a:p>
-        </p:txBody>
-      </p:sp>
-    </p:spTree>
-  </p:cSld>
-  <p:clrMapOvr>
-    <a:masterClrMapping/>
-  </p:clrMapOvr>
-</p:notes>
-</file>
-
-<file path=ppt/notesSlides/notesSlide10.xml><?xml version="1.0" encoding="utf-8"?>
-<p:notes xmlns:a="http://schemas.openxmlformats.org/drawingml/2006/main" xmlns:p="http://schemas.openxmlformats.org/presentationml/2006/main" xmlns:r="http://schemas.openxmlformats.org/officeDocument/2006/relationships">
-  <p:cSld>
-    <p:spTree>
-      <p:nvGrpSpPr>
-        <p:cNvPr id="1" name=""/>
-        <p:cNvGrpSpPr/>
-        <p:nvPr/>
-      </p:nvGrpSpPr>
-      <p:grpSpPr>
-        <a:xfrm>
-          <a:off x="0" y="0"/>
-          <a:ext cx="0" cy="0"/>
-          <a:chOff x="0" y="0"/>
-          <a:chExt cx="0" cy="0"/>
-        </a:xfrm>
-      </p:grpSpPr>
-      <p:sp>
-        <p:nvSpPr>
-          <p:cNvPr id="2" name="讲课提示"/>
-          <p:cNvSpPr txBox="1"/>
-          <p:nvPr/>
-        </p:nvSpPr>
-        <p:spPr>
-          <a:xfrm>
-            <a:off x="457200" y="457200"/>
-            <a:ext cx="6858000" cy="4800600"/>
-          </a:xfrm>
-          <a:prstGeom prst="rect">
-            <a:avLst/>
-          </a:prstGeom>
-        </p:spPr>
-        <p:txBody>
-          <a:bodyPr wrap="square"/>
-          <a:lstStyle/>
-          <a:p>
-            <a:r>
-              <a:rPr lang="zh-CN" dirty="0"/>
-              <a:t>单元 21 小结 · 单元 21 · 小结</a:t>
-            </a:r>
-          </a:p>
-          <a:p>
-            <a:r>
-              <a:rPr lang="zh-CN" dirty="0"/>
-              <a:t/>
-            </a:r>
-          </a:p>
-          <a:p>
-            <a:r>
-              <a:rPr lang="zh-CN" dirty="0"/>
-              <a:t>收尾动作：让学生合上讲义，口述本单元三个最重要的结论；说不出来的，回对应课节。</a:t>
-            </a:r>
-          </a:p>
-          <a:p>
-            <a:r>
-              <a:rPr lang="zh-CN" dirty="0"/>
-              <a:t>然后当场勾一遍本单元课节的「已完成」，没打勾的进下一单元前补掉。</a:t>
-            </a:r>
-          </a:p>
-        </p:txBody>
-      </p:sp>
-      <p:sp>
-        <p:nvSpPr>
-          <p:cNvPr id="2" name="讲课提示"/>
-          <p:cNvSpPr txBox="1"/>
-          <p:nvPr/>
-        </p:nvSpPr>
-        <p:spPr>
-          <a:xfrm>
-            <a:off x="457200" y="457200"/>
-            <a:ext cx="6858000" cy="4800600"/>
-          </a:xfrm>
-          <a:prstGeom prst="rect">
-            <a:avLst/>
-          </a:prstGeom>
-        </p:spPr>
-        <p:txBody>
-          <a:bodyPr wrap="square"/>
-          <a:lstStyle/>
-          <a:p>
-            <a:r>
-              <a:rPr lang="zh-CN" dirty="0"/>
-              <a:t>单元 21 小结 · 单元 21 · 小结</a:t>
-            </a:r>
-          </a:p>
-          <a:p>
-            <a:r>
-              <a:rPr lang="zh-CN" dirty="0"/>
-              <a:t/>
-            </a:r>
-          </a:p>
-          <a:p>
-            <a:r>
-              <a:rPr lang="zh-CN" dirty="0"/>
-              <a:t>收尾动作：让学生合上讲义，口述本单元三个最重要的结论；说不出来的，回对应课节。</a:t>
-            </a:r>
-          </a:p>
-          <a:p>
-            <a:r>
-              <a:rPr lang="zh-CN" dirty="0"/>
-              <a:t>然后当场勾一遍本单元课节的「已完成」，没打勾的进下一单元前补掉。</a:t>
-            </a:r>
-          </a:p>
-        </p:txBody>
-      </p:sp>
-    </p:spTree>
-  </p:cSld>
-  <p:clrMapOvr>
-    <a:masterClrMapping/>
-  </p:clrMapOvr>
-</p:notes>
-</file>
-
-<file path=ppt/notesSlides/notesSlide2.xml><?xml version="1.0" encoding="utf-8"?>
-<p:notes xmlns:a="http://schemas.openxmlformats.org/drawingml/2006/main" xmlns:p="http://schemas.openxmlformats.org/presentationml/2006/main" xmlns:r="http://schemas.openxmlformats.org/officeDocument/2006/relationships">
-  <p:cSld>
-    <p:spTree>
-      <p:nvGrpSpPr>
-        <p:cNvPr id="1" name=""/>
-        <p:cNvGrpSpPr/>
-        <p:nvPr/>
-      </p:nvGrpSpPr>
-      <p:grpSpPr>
-        <a:xfrm>
-          <a:off x="0" y="0"/>
-          <a:ext cx="0" cy="0"/>
-          <a:chOff x="0" y="0"/>
-          <a:chExt cx="0" cy="0"/>
-        </a:xfrm>
-      </p:grpSpPr>
-      <p:sp>
-        <p:nvSpPr>
-          <p:cNvPr id="2" name="讲课提示"/>
-          <p:cNvSpPr txBox="1"/>
-          <p:nvPr/>
-        </p:nvSpPr>
-        <p:spPr>
-          <a:xfrm>
-            <a:off x="457200" y="457200"/>
-            <a:ext cx="6858000" cy="4800600"/>
-          </a:xfrm>
-          <a:prstGeom prst="rect">
-            <a:avLst/>
-          </a:prstGeom>
-        </p:spPr>
-        <p:txBody>
-          <a:bodyPr wrap="square"/>
-          <a:lstStyle/>
-          <a:p>
-            <a:r>
-              <a:rPr lang="zh-CN" dirty="0"/>
-              <a:t>第 108 节 · 工程流程回顾与技术地图</a:t>
-            </a:r>
-          </a:p>
-          <a:p>
-            <a:r>
-              <a:rPr lang="zh-CN" dirty="0"/>
-              <a:t>单元 21 · 阶段 2 综合 + 关卡 2 验收 · W28</a:t>
-            </a:r>
-          </a:p>
-          <a:p>
-            <a:r>
-              <a:rPr lang="zh-CN" dirty="0"/>
-              <a:t/>
-            </a:r>
-          </a:p>
-          <a:p>
-            <a:r>
-              <a:rPr lang="zh-CN" dirty="0"/>
-              <a:t>学习目标：掌握「读需求 → 拆解 → 查文档 → 编码 → 提交 → README → 重构」七步流程</a:t>
-            </a:r>
-          </a:p>
-          <a:p>
-            <a:r>
-              <a:rPr lang="zh-CN" dirty="0"/>
-              <a:t/>
-            </a:r>
-          </a:p>
-          <a:p>
-            <a:r>
-              <a:rPr lang="zh-CN" dirty="0"/>
-              <a:t>课堂实操（40 分钟，不看答案）：</a:t>
-            </a:r>
-          </a:p>
-          <a:p>
-            <a:r>
-              <a:rPr lang="zh-CN" dirty="0"/>
-              <a:t>· 用七步流程复盘自己这三个项目各走了哪几步</a:t>
-            </a:r>
-          </a:p>
-          <a:p>
-            <a:r>
-              <a:rPr lang="zh-CN" dirty="0"/>
-              <a:t>· 给一个需求现场拆成步骤清单</a:t>
-            </a:r>
-          </a:p>
-          <a:p>
-            <a:r>
-              <a:rPr lang="zh-CN" dirty="0"/>
-              <a:t/>
-            </a:r>
-          </a:p>
-          <a:p>
-            <a:r>
-              <a:rPr lang="zh-CN" dirty="0"/>
-              <a:t>课后作业：</a:t>
-            </a:r>
-          </a:p>
-          <a:p>
-            <a:r>
-              <a:rPr lang="zh-CN" dirty="0"/>
-              <a:t>· 产出：三项目的工程流程自查表</a:t>
-            </a:r>
-          </a:p>
-          <a:p>
-            <a:r>
-              <a:rPr lang="zh-CN" dirty="0"/>
-              <a:t/>
-            </a:r>
-          </a:p>
-          <a:p>
-            <a:r>
-              <a:rPr lang="zh-CN" dirty="0"/>
-              <a:t>节奏：讲 20 分钟 → 学员自己敲 40 分钟（不看答案）→ 对讲评自查 20 分钟 → 写作业 10 分钟。</a:t>
-            </a:r>
-          </a:p>
-        </p:txBody>
-      </p:sp>
-      <p:sp>
-        <p:nvSpPr>
-          <p:cNvPr id="2" name="讲课提示"/>
-          <p:cNvSpPr txBox="1"/>
-          <p:nvPr/>
-        </p:nvSpPr>
-        <p:spPr>
-          <a:xfrm>
-            <a:off x="457200" y="457200"/>
-            <a:ext cx="6858000" cy="4800600"/>
-          </a:xfrm>
-          <a:prstGeom prst="rect">
-            <a:avLst/>
-          </a:prstGeom>
-        </p:spPr>
-        <p:txBody>
-          <a:bodyPr wrap="square"/>
-          <a:lstStyle/>
-          <a:p>
-            <a:r>
-              <a:rPr lang="zh-CN" dirty="0"/>
-              <a:t>第 108 节 · 工程流程回顾与技术地图</a:t>
-            </a:r>
-          </a:p>
-          <a:p>
-            <a:r>
-              <a:rPr lang="zh-CN" dirty="0"/>
-              <a:t>单元 21 · 阶段 2 综合 + 关卡 2 验收 · W28</a:t>
-            </a:r>
-          </a:p>
-          <a:p>
-            <a:r>
-              <a:rPr lang="zh-CN" dirty="0"/>
-              <a:t/>
-            </a:r>
-          </a:p>
-          <a:p>
-            <a:r>
-              <a:rPr lang="zh-CN" dirty="0"/>
-              <a:t>学习目标：掌握「读需求 → 拆解 → 查文档 → 编码 → 提交 → README → 重构」七步流程</a:t>
-            </a:r>
-          </a:p>
-          <a:p>
-            <a:r>
-              <a:rPr lang="zh-CN" dirty="0"/>
-              <a:t/>
-            </a:r>
-          </a:p>
-          <a:p>
-            <a:r>
-              <a:rPr lang="zh-CN" dirty="0"/>
-              <a:t>课堂实操（40 分钟，不看答案）：</a:t>
-            </a:r>
-          </a:p>
-          <a:p>
-            <a:r>
-              <a:rPr lang="zh-CN" dirty="0"/>
-              <a:t>· 用七步流程复盘自己这三个项目各走了哪几步</a:t>
-            </a:r>
-          </a:p>
-          <a:p>
-            <a:r>
-              <a:rPr lang="zh-CN" dirty="0"/>
-              <a:t>· 给一个需求现场拆成步骤清单</a:t>
-            </a:r>
-          </a:p>
-          <a:p>
-            <a:r>
-              <a:rPr lang="zh-CN" dirty="0"/>
-              <a:t/>
-            </a:r>
-          </a:p>
-          <a:p>
-            <a:r>
-              <a:rPr lang="zh-CN" dirty="0"/>
-              <a:t>课后作业：</a:t>
-            </a:r>
-          </a:p>
-          <a:p>
-            <a:r>
-              <a:rPr lang="zh-CN" dirty="0"/>
-              <a:t>· 产出：三项目的工程流程自查表</a:t>
-            </a:r>
-          </a:p>
-          <a:p>
-            <a:r>
-              <a:rPr lang="zh-CN" dirty="0"/>
-              <a:t/>
-            </a:r>
-          </a:p>
-          <a:p>
-            <a:r>
-              <a:rPr lang="zh-CN" dirty="0"/>
-              <a:t>节奏：讲 20 分钟 → 学员自己敲 40 分钟（不看答案）→ 对讲评自查 20 分钟 → 写作业 10 分钟。</a:t>
-            </a:r>
-          </a:p>
-        </p:txBody>
-      </p:sp>
-    </p:spTree>
-  </p:cSld>
-  <p:clrMapOvr>
-    <a:masterClrMapping/>
-  </p:clrMapOvr>
-</p:notes>
-</file>
-
-<file path=ppt/notesSlides/notesSlide3.xml><?xml version="1.0" encoding="utf-8"?>
-<p:notes xmlns:a="http://schemas.openxmlformats.org/drawingml/2006/main" xmlns:p="http://schemas.openxmlformats.org/presentationml/2006/main" xmlns:r="http://schemas.openxmlformats.org/officeDocument/2006/relationships">
-  <p:cSld>
-    <p:spTree>
-      <p:nvGrpSpPr>
-        <p:cNvPr id="1" name=""/>
-        <p:cNvGrpSpPr/>
-        <p:nvPr/>
-      </p:nvGrpSpPr>
-      <p:grpSpPr>
-        <a:xfrm>
-          <a:off x="0" y="0"/>
-          <a:ext cx="0" cy="0"/>
-          <a:chOff x="0" y="0"/>
-          <a:chExt cx="0" cy="0"/>
-        </a:xfrm>
-      </p:grpSpPr>
-      <p:sp>
-        <p:nvSpPr>
-          <p:cNvPr id="2" name="讲课提示"/>
-          <p:cNvSpPr txBox="1"/>
-          <p:nvPr/>
-        </p:nvSpPr>
-        <p:spPr>
-          <a:xfrm>
-            <a:off x="457200" y="457200"/>
-            <a:ext cx="6858000" cy="4800600"/>
-          </a:xfrm>
-          <a:prstGeom prst="rect">
-            <a:avLst/>
-          </a:prstGeom>
-        </p:spPr>
-        <p:txBody>
-          <a:bodyPr wrap="square"/>
-          <a:lstStyle/>
-          <a:p>
-            <a:r>
-              <a:rPr lang="zh-CN" dirty="0"/>
-              <a:t>第 108 节 · 核心知识点：工程流程回顾与技术地图</a:t>
-            </a:r>
-          </a:p>
-          <a:p>
-            <a:r>
-              <a:rPr lang="zh-CN" dirty="0"/>
-              <a:t/>
-            </a:r>
-          </a:p>
-          <a:p>
-            <a:r>
-              <a:rPr lang="zh-CN" dirty="0"/>
-              <a:t>讲这一页时：先让学生说出上节课的结论，再逐块讲要点。</a:t>
-            </a:r>
-          </a:p>
-          <a:p>
-            <a:r>
-              <a:rPr lang="zh-CN" dirty="0"/>
-              <a:t>每讲完一块，问一句「这一步如果写错了，报错会长什么样？」——把错误提前讲。</a:t>
-            </a:r>
-          </a:p>
-          <a:p>
-            <a:r>
-              <a:rPr lang="zh-CN" dirty="0"/>
-              <a:t/>
-            </a:r>
-          </a:p>
-          <a:p>
-            <a:r>
-              <a:rPr lang="zh-CN" dirty="0"/>
-              <a:t>本节目标：掌握「读需求 → 拆解 → 查文档 → 编码 → 提交 → README → 重构」七步流程</a:t>
-            </a:r>
-          </a:p>
-          <a:p>
-            <a:r>
-              <a:rPr lang="zh-CN" dirty="0"/>
-              <a:t/>
-            </a:r>
-          </a:p>
-          <a:p>
-            <a:r>
-              <a:rPr lang="zh-CN" dirty="0"/>
-              <a:t>看不到懂的地方，回讲义对应小节读一遍，再回来对着这页复述一次——能讲出来才算真懂。</a:t>
-            </a:r>
-          </a:p>
-        </p:txBody>
-      </p:sp>
-      <p:sp>
-        <p:nvSpPr>
-          <p:cNvPr id="2" name="讲课提示"/>
-          <p:cNvSpPr txBox="1"/>
-          <p:nvPr/>
-        </p:nvSpPr>
-        <p:spPr>
-          <a:xfrm>
-            <a:off x="457200" y="457200"/>
-            <a:ext cx="6858000" cy="4800600"/>
-          </a:xfrm>
-          <a:prstGeom prst="rect">
-            <a:avLst/>
-          </a:prstGeom>
-        </p:spPr>
-        <p:txBody>
-          <a:bodyPr wrap="square"/>
-          <a:lstStyle/>
-          <a:p>
-            <a:r>
-              <a:rPr lang="zh-CN" dirty="0"/>
-              <a:t>第 108 节 · 核心知识点：工程流程回顾与技术地图</a:t>
-            </a:r>
-          </a:p>
-          <a:p>
-            <a:r>
-              <a:rPr lang="zh-CN" dirty="0"/>
-              <a:t/>
-            </a:r>
-          </a:p>
-          <a:p>
-            <a:r>
-              <a:rPr lang="zh-CN" dirty="0"/>
-              <a:t>讲这一页时：先让学生说出上节课的结论，再逐块讲要点。</a:t>
-            </a:r>
-          </a:p>
-          <a:p>
-            <a:r>
-              <a:rPr lang="zh-CN" dirty="0"/>
-              <a:t>每讲完一块，问一句「这一步如果写错了，报错会长什么样？」——把错误提前讲。</a:t>
-            </a:r>
-          </a:p>
-          <a:p>
-            <a:r>
-              <a:rPr lang="zh-CN" dirty="0"/>
-              <a:t/>
-            </a:r>
-          </a:p>
-          <a:p>
-            <a:r>
-              <a:rPr lang="zh-CN" dirty="0"/>
-              <a:t>本节目标：掌握「读需求 → 拆解 → 查文档 → 编码 → 提交 → README → 重构」七步流程</a:t>
-            </a:r>
-          </a:p>
-          <a:p>
-            <a:r>
-              <a:rPr lang="zh-CN" dirty="0"/>
-              <a:t/>
-            </a:r>
-          </a:p>
-          <a:p>
-            <a:r>
-              <a:rPr lang="zh-CN" dirty="0"/>
-              <a:t>看不到懂的地方，回讲义对应小节读一遍，再回来对着这页复述一次——能讲出来才算真懂。</a:t>
-            </a:r>
-          </a:p>
-        </p:txBody>
-      </p:sp>
-    </p:spTree>
-  </p:cSld>
-  <p:clrMapOvr>
-    <a:masterClrMapping/>
-  </p:clrMapOvr>
-</p:notes>
-</file>
-
-<file path=ppt/notesSlides/notesSlide4.xml><?xml version="1.0" encoding="utf-8"?>
-<p:notes xmlns:a="http://schemas.openxmlformats.org/drawingml/2006/main" xmlns:p="http://schemas.openxmlformats.org/presentationml/2006/main" xmlns:r="http://schemas.openxmlformats.org/officeDocument/2006/relationships">
-  <p:cSld>
-    <p:spTree>
-      <p:nvGrpSpPr>
-        <p:cNvPr id="1" name=""/>
-        <p:cNvGrpSpPr/>
-        <p:nvPr/>
-      </p:nvGrpSpPr>
-      <p:grpSpPr>
-        <a:xfrm>
-          <a:off x="0" y="0"/>
-          <a:ext cx="0" cy="0"/>
-          <a:chOff x="0" y="0"/>
-          <a:chExt cx="0" cy="0"/>
-        </a:xfrm>
-      </p:grpSpPr>
-      <p:sp>
-        <p:nvSpPr>
-          <p:cNvPr id="2" name="讲课提示"/>
-          <p:cNvSpPr txBox="1"/>
-          <p:nvPr/>
-        </p:nvSpPr>
-        <p:spPr>
-          <a:xfrm>
-            <a:off x="457200" y="457200"/>
-            <a:ext cx="6858000" cy="4800600"/>
-          </a:xfrm>
-          <a:prstGeom prst="rect">
-            <a:avLst/>
-          </a:prstGeom>
-        </p:spPr>
-        <p:txBody>
-          <a:bodyPr wrap="square"/>
-          <a:lstStyle/>
-          <a:p>
-            <a:r>
-              <a:rPr lang="zh-CN" dirty="0"/>
-              <a:t>第 109 节 · 能力跃迁与工程问题速查</a:t>
-            </a:r>
-          </a:p>
-          <a:p>
-            <a:r>
-              <a:rPr lang="zh-CN" dirty="0"/>
-              <a:t>单元 21 · 阶段 2 综合 + 关卡 2 验收 · W28–W29</a:t>
-            </a:r>
-          </a:p>
-          <a:p>
-            <a:r>
-              <a:rPr lang="zh-CN" dirty="0"/>
-              <a:t/>
-            </a:r>
-          </a:p>
-          <a:p>
-            <a:r>
-              <a:rPr lang="zh-CN" dirty="0"/>
-              <a:t>学习目标：说清从脚本到项目的跃迁；会用 requirements.txt / .gitignore / 环境变量</a:t>
-            </a:r>
-          </a:p>
-          <a:p>
-            <a:r>
-              <a:rPr lang="zh-CN" dirty="0"/>
-              <a:t/>
-            </a:r>
-          </a:p>
-          <a:p>
-            <a:r>
-              <a:rPr lang="zh-CN" dirty="0"/>
-              <a:t>课堂实操（40 分钟，不看答案）：</a:t>
-            </a:r>
-          </a:p>
-          <a:p>
-            <a:r>
-              <a:rPr lang="zh-CN" dirty="0"/>
-              <a:t>· 给三个项目各跑一次「工程件体检」</a:t>
-            </a:r>
-          </a:p>
-          <a:p>
-            <a:r>
-              <a:rPr lang="zh-CN" dirty="0"/>
-              <a:t>· 把一个密钥从代码里挪到环境变量</a:t>
-            </a:r>
-          </a:p>
-          <a:p>
-            <a:r>
-              <a:rPr lang="zh-CN" dirty="0"/>
-              <a:t/>
-            </a:r>
-          </a:p>
-          <a:p>
-            <a:r>
-              <a:rPr lang="zh-CN" dirty="0"/>
-              <a:t>课后作业：</a:t>
-            </a:r>
-          </a:p>
-          <a:p>
-            <a:r>
-              <a:rPr lang="zh-CN" dirty="0"/>
-              <a:t>· 产出：三个项目的 README + requirements.txt</a:t>
-            </a:r>
-          </a:p>
-          <a:p>
-            <a:r>
-              <a:rPr lang="zh-CN" dirty="0"/>
-              <a:t/>
-            </a:r>
-          </a:p>
-          <a:p>
-            <a:r>
-              <a:rPr lang="zh-CN" dirty="0"/>
-              <a:t>节奏：讲 20 分钟 → 学员自己敲 40 分钟（不看答案）→ 对讲评自查 20 分钟 → 写作业 10 分钟。</a:t>
-            </a:r>
-          </a:p>
-        </p:txBody>
-      </p:sp>
-      <p:sp>
-        <p:nvSpPr>
-          <p:cNvPr id="2" name="讲课提示"/>
-          <p:cNvSpPr txBox="1"/>
-          <p:nvPr/>
-        </p:nvSpPr>
-        <p:spPr>
-          <a:xfrm>
-            <a:off x="457200" y="457200"/>
-            <a:ext cx="6858000" cy="4800600"/>
-          </a:xfrm>
-          <a:prstGeom prst="rect">
-            <a:avLst/>
-          </a:prstGeom>
-        </p:spPr>
-        <p:txBody>
-          <a:bodyPr wrap="square"/>
-          <a:lstStyle/>
-          <a:p>
-            <a:r>
-              <a:rPr lang="zh-CN" dirty="0"/>
-              <a:t>第 109 节 · 能力跃迁与工程问题速查</a:t>
-            </a:r>
-          </a:p>
-          <a:p>
-            <a:r>
-              <a:rPr lang="zh-CN" dirty="0"/>
-              <a:t>单元 21 · 阶段 2 综合 + 关卡 2 验收 · W28–W29</a:t>
-            </a:r>
-          </a:p>
-          <a:p>
-            <a:r>
-              <a:rPr lang="zh-CN" dirty="0"/>
-              <a:t/>
-            </a:r>
-          </a:p>
-          <a:p>
-            <a:r>
-              <a:rPr lang="zh-CN" dirty="0"/>
-              <a:t>学习目标：说清从脚本到项目的跃迁；会用 requirements.txt / .gitignore / 环境变量</a:t>
-            </a:r>
-          </a:p>
-          <a:p>
-            <a:r>
-              <a:rPr lang="zh-CN" dirty="0"/>
-              <a:t/>
-            </a:r>
-          </a:p>
-          <a:p>
-            <a:r>
-              <a:rPr lang="zh-CN" dirty="0"/>
-              <a:t>课堂实操（40 分钟，不看答案）：</a:t>
-            </a:r>
-          </a:p>
-          <a:p>
-            <a:r>
-              <a:rPr lang="zh-CN" dirty="0"/>
-              <a:t>· 给三个项目各跑一次「工程件体检」</a:t>
-            </a:r>
-          </a:p>
-          <a:p>
-            <a:r>
-              <a:rPr lang="zh-CN" dirty="0"/>
-              <a:t>· 把一个密钥从代码里挪到环境变量</a:t>
-            </a:r>
-          </a:p>
-          <a:p>
-            <a:r>
-              <a:rPr lang="zh-CN" dirty="0"/>
-              <a:t/>
-            </a:r>
-          </a:p>
-          <a:p>
-            <a:r>
-              <a:rPr lang="zh-CN" dirty="0"/>
-              <a:t>课后作业：</a:t>
-            </a:r>
-          </a:p>
-          <a:p>
-            <a:r>
-              <a:rPr lang="zh-CN" dirty="0"/>
-              <a:t>· 产出：三个项目的 README + requirements.txt</a:t>
-            </a:r>
-          </a:p>
-          <a:p>
-            <a:r>
-              <a:rPr lang="zh-CN" dirty="0"/>
-              <a:t/>
-            </a:r>
-          </a:p>
-          <a:p>
-            <a:r>
-              <a:rPr lang="zh-CN" dirty="0"/>
-              <a:t>节奏：讲 20 分钟 → 学员自己敲 40 分钟（不看答案）→ 对讲评自查 20 分钟 → 写作业 10 分钟。</a:t>
-            </a:r>
-          </a:p>
-        </p:txBody>
-      </p:sp>
-    </p:spTree>
-  </p:cSld>
-  <p:clrMapOvr>
-    <a:masterClrMapping/>
-  </p:clrMapOvr>
-</p:notes>
-</file>
-
-<file path=ppt/notesSlides/notesSlide5.xml><?xml version="1.0" encoding="utf-8"?>
-<p:notes xmlns:a="http://schemas.openxmlformats.org/drawingml/2006/main" xmlns:p="http://schemas.openxmlformats.org/presentationml/2006/main" xmlns:r="http://schemas.openxmlformats.org/officeDocument/2006/relationships">
-  <p:cSld>
-    <p:spTree>
-      <p:nvGrpSpPr>
-        <p:cNvPr id="1" name=""/>
-        <p:cNvGrpSpPr/>
-        <p:nvPr/>
-      </p:nvGrpSpPr>
-      <p:grpSpPr>
-        <a:xfrm>
-          <a:off x="0" y="0"/>
-          <a:ext cx="0" cy="0"/>
-          <a:chOff x="0" y="0"/>
-          <a:chExt cx="0" cy="0"/>
-        </a:xfrm>
-      </p:grpSpPr>
-      <p:sp>
-        <p:nvSpPr>
-          <p:cNvPr id="2" name="讲课提示"/>
-          <p:cNvSpPr txBox="1"/>
-          <p:nvPr/>
-        </p:nvSpPr>
-        <p:spPr>
-          <a:xfrm>
-            <a:off x="457200" y="457200"/>
-            <a:ext cx="6858000" cy="4800600"/>
-          </a:xfrm>
-          <a:prstGeom prst="rect">
-            <a:avLst/>
-          </a:prstGeom>
-        </p:spPr>
-        <p:txBody>
-          <a:bodyPr wrap="square"/>
-          <a:lstStyle/>
-          <a:p>
-            <a:r>
-              <a:rPr lang="zh-CN" dirty="0"/>
-              <a:t>第 109 节 · 核心知识点：能力跃迁与工程问题速查</a:t>
-            </a:r>
-          </a:p>
-          <a:p>
-            <a:r>
-              <a:rPr lang="zh-CN" dirty="0"/>
-              <a:t/>
-            </a:r>
-          </a:p>
-          <a:p>
-            <a:r>
-              <a:rPr lang="zh-CN" dirty="0"/>
-              <a:t>讲这一页时：先让学生说出上节课的结论，再逐块讲要点。</a:t>
-            </a:r>
-          </a:p>
-          <a:p>
-            <a:r>
-              <a:rPr lang="zh-CN" dirty="0"/>
-              <a:t>每讲完一块，问一句「这一步如果写错了，报错会长什么样？」——把错误提前讲。</a:t>
-            </a:r>
-          </a:p>
-          <a:p>
-            <a:r>
-              <a:rPr lang="zh-CN" dirty="0"/>
-              <a:t/>
-            </a:r>
-          </a:p>
-          <a:p>
-            <a:r>
-              <a:rPr lang="zh-CN" dirty="0"/>
-              <a:t>本节目标：说清从脚本到项目的跃迁；会用 requirements.txt / .gitignore / 环境变量</a:t>
-            </a:r>
-          </a:p>
-          <a:p>
-            <a:r>
-              <a:rPr lang="zh-CN" dirty="0"/>
-              <a:t/>
-            </a:r>
-          </a:p>
-          <a:p>
-            <a:r>
-              <a:rPr lang="zh-CN" dirty="0"/>
-              <a:t>看不到懂的地方，回讲义对应小节读一遍，再回来对着这页复述一次——能讲出来才算真懂。</a:t>
-            </a:r>
-          </a:p>
-        </p:txBody>
-      </p:sp>
-      <p:sp>
-        <p:nvSpPr>
-          <p:cNvPr id="2" name="讲课提示"/>
-          <p:cNvSpPr txBox="1"/>
-          <p:nvPr/>
-        </p:nvSpPr>
-        <p:spPr>
-          <a:xfrm>
-            <a:off x="457200" y="457200"/>
-            <a:ext cx="6858000" cy="4800600"/>
-          </a:xfrm>
-          <a:prstGeom prst="rect">
-            <a:avLst/>
-          </a:prstGeom>
-        </p:spPr>
-        <p:txBody>
-          <a:bodyPr wrap="square"/>
-          <a:lstStyle/>
-          <a:p>
-            <a:r>
-              <a:rPr lang="zh-CN" dirty="0"/>
-              <a:t>第 109 节 · 核心知识点：能力跃迁与工程问题速查</a:t>
-            </a:r>
-          </a:p>
-          <a:p>
-            <a:r>
-              <a:rPr lang="zh-CN" dirty="0"/>
-              <a:t/>
-            </a:r>
-          </a:p>
-          <a:p>
-            <a:r>
-              <a:rPr lang="zh-CN" dirty="0"/>
-              <a:t>讲这一页时：先让学生说出上节课的结论，再逐块讲要点。</a:t>
-            </a:r>
-          </a:p>
-          <a:p>
-            <a:r>
-              <a:rPr lang="zh-CN" dirty="0"/>
-              <a:t>每讲完一块，问一句「这一步如果写错了，报错会长什么样？」——把错误提前讲。</a:t>
-            </a:r>
-          </a:p>
-          <a:p>
-            <a:r>
-              <a:rPr lang="zh-CN" dirty="0"/>
-              <a:t/>
-            </a:r>
-          </a:p>
-          <a:p>
-            <a:r>
-              <a:rPr lang="zh-CN" dirty="0"/>
-              <a:t>本节目标：说清从脚本到项目的跃迁；会用 requirements.txt / .gitignore / 环境变量</a:t>
-            </a:r>
-          </a:p>
-          <a:p>
-            <a:r>
-              <a:rPr lang="zh-CN" dirty="0"/>
-              <a:t/>
-            </a:r>
-          </a:p>
-          <a:p>
-            <a:r>
-              <a:rPr lang="zh-CN" dirty="0"/>
-              <a:t>看不到懂的地方，回讲义对应小节读一遍，再回来对着这页复述一次——能讲出来才算真懂。</a:t>
-            </a:r>
-          </a:p>
-        </p:txBody>
-      </p:sp>
-    </p:spTree>
-  </p:cSld>
-  <p:clrMapOvr>
-    <a:masterClrMapping/>
-  </p:clrMapOvr>
-</p:notes>
-</file>
-
-<file path=ppt/notesSlides/notesSlide6.xml><?xml version="1.0" encoding="utf-8"?>
-<p:notes xmlns:a="http://schemas.openxmlformats.org/drawingml/2006/main" xmlns:p="http://schemas.openxmlformats.org/presentationml/2006/main" xmlns:r="http://schemas.openxmlformats.org/officeDocument/2006/relationships">
-  <p:cSld>
-    <p:spTree>
-      <p:nvGrpSpPr>
-        <p:cNvPr id="1" name=""/>
-        <p:cNvGrpSpPr/>
-        <p:nvPr/>
-      </p:nvGrpSpPr>
-      <p:grpSpPr>
-        <a:xfrm>
-          <a:off x="0" y="0"/>
-          <a:ext cx="0" cy="0"/>
-          <a:chOff x="0" y="0"/>
-          <a:chExt cx="0" cy="0"/>
-        </a:xfrm>
-      </p:grpSpPr>
-      <p:sp>
-        <p:nvSpPr>
-          <p:cNvPr id="2" name="讲课提示"/>
-          <p:cNvSpPr txBox="1"/>
-          <p:nvPr/>
-        </p:nvSpPr>
-        <p:spPr>
-          <a:xfrm>
-            <a:off x="457200" y="457200"/>
-            <a:ext cx="6858000" cy="4800600"/>
-          </a:xfrm>
-          <a:prstGeom prst="rect">
-            <a:avLst/>
-          </a:prstGeom>
-        </p:spPr>
-        <p:txBody>
-          <a:bodyPr wrap="square"/>
-          <a:lstStyle/>
-          <a:p>
-            <a:r>
-              <a:rPr lang="zh-CN" dirty="0"/>
-              <a:t>第 110 节 · ★ 关卡 2 五项逐条自测</a:t>
-            </a:r>
-          </a:p>
-          <a:p>
-            <a:r>
-              <a:rPr lang="zh-CN" dirty="0"/>
-              <a:t>单元 21 · 阶段 2 综合 + 关卡 2 验收 · W29</a:t>
-            </a:r>
-          </a:p>
-          <a:p>
-            <a:r>
-              <a:rPr lang="zh-CN" dirty="0"/>
-              <a:t/>
-            </a:r>
-          </a:p>
-          <a:p>
-            <a:r>
-              <a:rPr lang="zh-CN" dirty="0"/>
-              <a:t>学习目标：限时自测五条硬指标，明确哪条没过、怎么补</a:t>
-            </a:r>
-          </a:p>
-          <a:p>
-            <a:r>
-              <a:rPr lang="zh-CN" dirty="0"/>
-              <a:t/>
-            </a:r>
-          </a:p>
-          <a:p>
-            <a:r>
-              <a:rPr lang="zh-CN" dirty="0"/>
-              <a:t>课堂实操（40 分钟，不看答案）：</a:t>
-            </a:r>
-          </a:p>
-          <a:p>
-            <a:r>
-              <a:rPr lang="zh-CN" dirty="0"/>
-              <a:t>· 逐条自测并记录结果</a:t>
-            </a:r>
-          </a:p>
-          <a:p>
-            <a:r>
-              <a:rPr lang="zh-CN" dirty="0"/>
-              <a:t>· 没过的项当场定补齐计划</a:t>
-            </a:r>
-          </a:p>
-          <a:p>
-            <a:r>
-              <a:rPr lang="zh-CN" dirty="0"/>
-              <a:t/>
-            </a:r>
-          </a:p>
-          <a:p>
-            <a:r>
-              <a:rPr lang="zh-CN" dirty="0"/>
-              <a:t>课后作业：</a:t>
-            </a:r>
-          </a:p>
-          <a:p>
-            <a:r>
-              <a:rPr lang="zh-CN" dirty="0"/>
-              <a:t>· ★ 关卡 2 五项逐条自测</a:t>
-            </a:r>
-          </a:p>
-          <a:p>
-            <a:r>
-              <a:rPr lang="zh-CN" dirty="0"/>
-              <a:t/>
-            </a:r>
-          </a:p>
-          <a:p>
-            <a:r>
-              <a:rPr lang="zh-CN" dirty="0"/>
-              <a:t>节奏：讲 20 分钟 → 学员自己敲 40 分钟（不看答案）→ 对讲评自查 20 分钟 → 写作业 10 分钟。</a:t>
-            </a:r>
-          </a:p>
-        </p:txBody>
-      </p:sp>
-      <p:sp>
-        <p:nvSpPr>
-          <p:cNvPr id="2" name="讲课提示"/>
-          <p:cNvSpPr txBox="1"/>
-          <p:nvPr/>
-        </p:nvSpPr>
-        <p:spPr>
-          <a:xfrm>
-            <a:off x="457200" y="457200"/>
-            <a:ext cx="6858000" cy="4800600"/>
-          </a:xfrm>
-          <a:prstGeom prst="rect">
-            <a:avLst/>
-          </a:prstGeom>
-        </p:spPr>
-        <p:txBody>
-          <a:bodyPr wrap="square"/>
-          <a:lstStyle/>
-          <a:p>
-            <a:r>
-              <a:rPr lang="zh-CN" dirty="0"/>
-              <a:t>第 110 节 · ★ 关卡 2 五项逐条自测</a:t>
-            </a:r>
-          </a:p>
-          <a:p>
-            <a:r>
-              <a:rPr lang="zh-CN" dirty="0"/>
-              <a:t>单元 21 · 阶段 2 综合 + 关卡 2 验收 · W29</a:t>
-            </a:r>
-          </a:p>
-          <a:p>
-            <a:r>
-              <a:rPr lang="zh-CN" dirty="0"/>
-              <a:t/>
-            </a:r>
-          </a:p>
-          <a:p>
-            <a:r>
-              <a:rPr lang="zh-CN" dirty="0"/>
-              <a:t>学习目标：限时自测五条硬指标，明确哪条没过、怎么补</a:t>
-            </a:r>
-          </a:p>
-          <a:p>
-            <a:r>
-              <a:rPr lang="zh-CN" dirty="0"/>
-              <a:t/>
-            </a:r>
-          </a:p>
-          <a:p>
-            <a:r>
-              <a:rPr lang="zh-CN" dirty="0"/>
-              <a:t>课堂实操（40 分钟，不看答案）：</a:t>
-            </a:r>
-          </a:p>
-          <a:p>
-            <a:r>
-              <a:rPr lang="zh-CN" dirty="0"/>
-              <a:t>· 逐条自测并记录结果</a:t>
-            </a:r>
-          </a:p>
-          <a:p>
-            <a:r>
-              <a:rPr lang="zh-CN" dirty="0"/>
-              <a:t>· 没过的项当场定补齐计划</a:t>
-            </a:r>
-          </a:p>
-          <a:p>
-            <a:r>
-              <a:rPr lang="zh-CN" dirty="0"/>
-              <a:t/>
-            </a:r>
-          </a:p>
-          <a:p>
-            <a:r>
-              <a:rPr lang="zh-CN" dirty="0"/>
-              <a:t>课后作业：</a:t>
-            </a:r>
-          </a:p>
-          <a:p>
-            <a:r>
-              <a:rPr lang="zh-CN" dirty="0"/>
-              <a:t>· ★ 关卡 2 五项逐条自测</a:t>
-            </a:r>
-          </a:p>
-          <a:p>
-            <a:r>
-              <a:rPr lang="zh-CN" dirty="0"/>
-              <a:t/>
-            </a:r>
-          </a:p>
-          <a:p>
-            <a:r>
-              <a:rPr lang="zh-CN" dirty="0"/>
-              <a:t>节奏：讲 20 分钟 → 学员自己敲 40 分钟（不看答案）→ 对讲评自查 20 分钟 → 写作业 10 分钟。</a:t>
-            </a:r>
-          </a:p>
-        </p:txBody>
-      </p:sp>
-    </p:spTree>
-  </p:cSld>
-  <p:clrMapOvr>
-    <a:masterClrMapping/>
-  </p:clrMapOvr>
-</p:notes>
-</file>
-
-<file path=ppt/notesSlides/notesSlide7.xml><?xml version="1.0" encoding="utf-8"?>
-<p:notes xmlns:a="http://schemas.openxmlformats.org/drawingml/2006/main" xmlns:p="http://schemas.openxmlformats.org/presentationml/2006/main" xmlns:r="http://schemas.openxmlformats.org/officeDocument/2006/relationships">
-  <p:cSld>
-    <p:spTree>
-      <p:nvGrpSpPr>
-        <p:cNvPr id="1" name=""/>
-        <p:cNvGrpSpPr/>
-        <p:nvPr/>
-      </p:nvGrpSpPr>
-      <p:grpSpPr>
-        <a:xfrm>
-          <a:off x="0" y="0"/>
-          <a:ext cx="0" cy="0"/>
-          <a:chOff x="0" y="0"/>
-          <a:chExt cx="0" cy="0"/>
-        </a:xfrm>
-      </p:grpSpPr>
-      <p:sp>
-        <p:nvSpPr>
-          <p:cNvPr id="2" name="讲课提示"/>
-          <p:cNvSpPr txBox="1"/>
-          <p:nvPr/>
-        </p:nvSpPr>
-        <p:spPr>
-          <a:xfrm>
-            <a:off x="457200" y="457200"/>
-            <a:ext cx="6858000" cy="4800600"/>
-          </a:xfrm>
-          <a:prstGeom prst="rect">
-            <a:avLst/>
-          </a:prstGeom>
-        </p:spPr>
-        <p:txBody>
-          <a:bodyPr wrap="square"/>
-          <a:lstStyle/>
-          <a:p>
-            <a:r>
-              <a:rPr lang="zh-CN" dirty="0"/>
-              <a:t>第 110 节 · 核心知识点：★ 关卡 2 五项逐条自测</a:t>
-            </a:r>
-          </a:p>
-          <a:p>
-            <a:r>
-              <a:rPr lang="zh-CN" dirty="0"/>
-              <a:t/>
-            </a:r>
-          </a:p>
-          <a:p>
-            <a:r>
-              <a:rPr lang="zh-CN" dirty="0"/>
-              <a:t>讲这一页时：先让学生说出上节课的结论，再逐块讲要点。</a:t>
-            </a:r>
-          </a:p>
-          <a:p>
-            <a:r>
-              <a:rPr lang="zh-CN" dirty="0"/>
-              <a:t>每讲完一块，问一句「这一步如果写错了，报错会长什么样？」——把错误提前讲。</a:t>
-            </a:r>
-          </a:p>
-          <a:p>
-            <a:r>
-              <a:rPr lang="zh-CN" dirty="0"/>
-              <a:t/>
-            </a:r>
-          </a:p>
-          <a:p>
-            <a:r>
-              <a:rPr lang="zh-CN" dirty="0"/>
-              <a:t>本节目标：限时自测五条硬指标，明确哪条没过、怎么补</a:t>
-            </a:r>
-          </a:p>
-          <a:p>
-            <a:r>
-              <a:rPr lang="zh-CN" dirty="0"/>
-              <a:t/>
-            </a:r>
-          </a:p>
-          <a:p>
-            <a:r>
-              <a:rPr lang="zh-CN" dirty="0"/>
-              <a:t>看不到懂的地方，回讲义对应小节读一遍，再回来对着这页复述一次——能讲出来才算真懂。</a:t>
-            </a:r>
-          </a:p>
-        </p:txBody>
-      </p:sp>
-      <p:sp>
-        <p:nvSpPr>
-          <p:cNvPr id="2" name="讲课提示"/>
-          <p:cNvSpPr txBox="1"/>
-          <p:nvPr/>
-        </p:nvSpPr>
-        <p:spPr>
-          <a:xfrm>
-            <a:off x="457200" y="457200"/>
-            <a:ext cx="6858000" cy="4800600"/>
-          </a:xfrm>
-          <a:prstGeom prst="rect">
-            <a:avLst/>
-          </a:prstGeom>
-        </p:spPr>
-        <p:txBody>
-          <a:bodyPr wrap="square"/>
-          <a:lstStyle/>
-          <a:p>
-            <a:r>
-              <a:rPr lang="zh-CN" dirty="0"/>
-              <a:t>第 110 节 · 核心知识点：★ 关卡 2 五项逐条自测</a:t>
-            </a:r>
-          </a:p>
-          <a:p>
-            <a:r>
-              <a:rPr lang="zh-CN" dirty="0"/>
-              <a:t/>
-            </a:r>
-          </a:p>
-          <a:p>
-            <a:r>
-              <a:rPr lang="zh-CN" dirty="0"/>
-              <a:t>讲这一页时：先让学生说出上节课的结论，再逐块讲要点。</a:t>
-            </a:r>
-          </a:p>
-          <a:p>
-            <a:r>
-              <a:rPr lang="zh-CN" dirty="0"/>
-              <a:t>每讲完一块，问一句「这一步如果写错了，报错会长什么样？」——把错误提前讲。</a:t>
-            </a:r>
-          </a:p>
-          <a:p>
-            <a:r>
-              <a:rPr lang="zh-CN" dirty="0"/>
-              <a:t/>
-            </a:r>
-          </a:p>
-          <a:p>
-            <a:r>
-              <a:rPr lang="zh-CN" dirty="0"/>
-              <a:t>本节目标：限时自测五条硬指标，明确哪条没过、怎么补</a:t>
-            </a:r>
-          </a:p>
-          <a:p>
-            <a:r>
-              <a:rPr lang="zh-CN" dirty="0"/>
-              <a:t/>
-            </a:r>
-          </a:p>
-          <a:p>
-            <a:r>
-              <a:rPr lang="zh-CN" dirty="0"/>
-              <a:t>看不到懂的地方，回讲义对应小节读一遍，再回来对着这页复述一次——能讲出来才算真懂。</a:t>
-            </a:r>
-          </a:p>
-        </p:txBody>
-      </p:sp>
-    </p:spTree>
-  </p:cSld>
-  <p:clrMapOvr>
-    <a:masterClrMapping/>
-  </p:clrMapOvr>
-</p:notes>
-</file>
-
-<file path=ppt/notesSlides/notesSlide8.xml><?xml version="1.0" encoding="utf-8"?>
-<p:notes xmlns:a="http://schemas.openxmlformats.org/drawingml/2006/main" xmlns:p="http://schemas.openxmlformats.org/presentationml/2006/main" xmlns:r="http://schemas.openxmlformats.org/officeDocument/2006/relationships">
-  <p:cSld>
-    <p:spTree>
-      <p:nvGrpSpPr>
-        <p:cNvPr id="1" name=""/>
-        <p:cNvGrpSpPr/>
-        <p:nvPr/>
-      </p:nvGrpSpPr>
-      <p:grpSpPr>
-        <a:xfrm>
-          <a:off x="0" y="0"/>
-          <a:ext cx="0" cy="0"/>
-          <a:chOff x="0" y="0"/>
-          <a:chExt cx="0" cy="0"/>
-        </a:xfrm>
-      </p:grpSpPr>
-      <p:sp>
-        <p:nvSpPr>
-          <p:cNvPr id="2" name="讲课提示"/>
-          <p:cNvSpPr txBox="1"/>
-          <p:nvPr/>
-        </p:nvSpPr>
-        <p:spPr>
-          <a:xfrm>
-            <a:off x="457200" y="457200"/>
-            <a:ext cx="6858000" cy="4800600"/>
-          </a:xfrm>
-          <a:prstGeom prst="rect">
-            <a:avLst/>
-          </a:prstGeom>
-        </p:spPr>
-        <p:txBody>
-          <a:bodyPr wrap="square"/>
-          <a:lstStyle/>
-          <a:p>
-            <a:r>
-              <a:rPr lang="zh-CN" dirty="0"/>
-              <a:t>第 111 节 · 综合项目与阶段 2 收尾</a:t>
-            </a:r>
-          </a:p>
-          <a:p>
-            <a:r>
-              <a:rPr lang="zh-CN" dirty="0"/>
-              <a:t>单元 21 · 阶段 2 综合 + 关卡 2 验收 · W29</a:t>
-            </a:r>
-          </a:p>
-          <a:p>
-            <a:r>
-              <a:rPr lang="zh-CN" dirty="0"/>
-              <a:t/>
-            </a:r>
-          </a:p>
-          <a:p>
-            <a:r>
-              <a:rPr lang="zh-CN" dirty="0"/>
-              <a:t>学习目标：任选一个综合项目做完，形成阶段 2 的收尾产出</a:t>
-            </a:r>
-          </a:p>
-          <a:p>
-            <a:r>
-              <a:rPr lang="zh-CN" dirty="0"/>
-              <a:t/>
-            </a:r>
-          </a:p>
-          <a:p>
-            <a:r>
-              <a:rPr lang="zh-CN" dirty="0"/>
-              <a:t>课堂实操（40 分钟，不看答案）：</a:t>
-            </a:r>
-          </a:p>
-          <a:p>
-            <a:r>
-              <a:rPr lang="zh-CN" dirty="0"/>
-              <a:t>· 任选 A/B/C 之一定题并开工</a:t>
-            </a:r>
-          </a:p>
-          <a:p>
-            <a:r>
-              <a:rPr lang="zh-CN" dirty="0"/>
-              <a:t>· 对照统一要求自查四条</a:t>
-            </a:r>
-          </a:p>
-          <a:p>
-            <a:r>
-              <a:rPr lang="zh-CN" dirty="0"/>
-              <a:t/>
-            </a:r>
-          </a:p>
-          <a:p>
-            <a:r>
-              <a:rPr lang="zh-CN" dirty="0"/>
-              <a:t>课后作业：</a:t>
-            </a:r>
-          </a:p>
-          <a:p>
-            <a:r>
-              <a:rPr lang="zh-CN" dirty="0"/>
-              <a:t>· ★ 产出：一个可展示的综合项目 + 阶段 1 学习总结</a:t>
-            </a:r>
-          </a:p>
-          <a:p>
-            <a:r>
-              <a:rPr lang="zh-CN" dirty="0"/>
-              <a:t/>
-            </a:r>
-          </a:p>
-          <a:p>
-            <a:r>
-              <a:rPr lang="zh-CN" dirty="0"/>
-              <a:t>节奏：讲 20 分钟 → 学员自己敲 40 分钟（不看答案）→ 对讲评自查 20 分钟 → 写作业 10 分钟。</a:t>
-            </a:r>
-          </a:p>
-        </p:txBody>
-      </p:sp>
-      <p:sp>
-        <p:nvSpPr>
-          <p:cNvPr id="2" name="讲课提示"/>
-          <p:cNvSpPr txBox="1"/>
-          <p:nvPr/>
-        </p:nvSpPr>
-        <p:spPr>
-          <a:xfrm>
-            <a:off x="457200" y="457200"/>
-            <a:ext cx="6858000" cy="4800600"/>
-          </a:xfrm>
-          <a:prstGeom prst="rect">
-            <a:avLst/>
-          </a:prstGeom>
-        </p:spPr>
-        <p:txBody>
-          <a:bodyPr wrap="square"/>
-          <a:lstStyle/>
-          <a:p>
-            <a:r>
-              <a:rPr lang="zh-CN" dirty="0"/>
-              <a:t>第 111 节 · 综合项目与阶段 2 收尾</a:t>
-            </a:r>
-          </a:p>
-          <a:p>
-            <a:r>
-              <a:rPr lang="zh-CN" dirty="0"/>
-              <a:t>单元 21 · 阶段 2 综合 + 关卡 2 验收 · W29</a:t>
-            </a:r>
-          </a:p>
-          <a:p>
-            <a:r>
-              <a:rPr lang="zh-CN" dirty="0"/>
-              <a:t/>
-            </a:r>
-          </a:p>
-          <a:p>
-            <a:r>
-              <a:rPr lang="zh-CN" dirty="0"/>
-              <a:t>学习目标：任选一个综合项目做完，形成阶段 2 的收尾产出</a:t>
-            </a:r>
-          </a:p>
-          <a:p>
-            <a:r>
-              <a:rPr lang="zh-CN" dirty="0"/>
-              <a:t/>
-            </a:r>
-          </a:p>
-          <a:p>
-            <a:r>
-              <a:rPr lang="zh-CN" dirty="0"/>
-              <a:t>课堂实操（40 分钟，不看答案）：</a:t>
-            </a:r>
-          </a:p>
-          <a:p>
-            <a:r>
-              <a:rPr lang="zh-CN" dirty="0"/>
-              <a:t>· 任选 A/B/C 之一定题并开工</a:t>
-            </a:r>
-          </a:p>
-          <a:p>
-            <a:r>
-              <a:rPr lang="zh-CN" dirty="0"/>
-              <a:t>· 对照统一要求自查四条</a:t>
-            </a:r>
-          </a:p>
-          <a:p>
-            <a:r>
-              <a:rPr lang="zh-CN" dirty="0"/>
-              <a:t/>
-            </a:r>
-          </a:p>
-          <a:p>
-            <a:r>
-              <a:rPr lang="zh-CN" dirty="0"/>
-              <a:t>课后作业：</a:t>
-            </a:r>
-          </a:p>
-          <a:p>
-            <a:r>
-              <a:rPr lang="zh-CN" dirty="0"/>
-              <a:t>· ★ 产出：一个可展示的综合项目 + 阶段 1 学习总结</a:t>
-            </a:r>
-          </a:p>
-          <a:p>
-            <a:r>
-              <a:rPr lang="zh-CN" dirty="0"/>
-              <a:t/>
-            </a:r>
-          </a:p>
-          <a:p>
-            <a:r>
-              <a:rPr lang="zh-CN" dirty="0"/>
-              <a:t>节奏：讲 20 分钟 → 学员自己敲 40 分钟（不看答案）→ 对讲评自查 20 分钟 → 写作业 10 分钟。</a:t>
-            </a:r>
-          </a:p>
-        </p:txBody>
-      </p:sp>
-    </p:spTree>
-  </p:cSld>
-  <p:clrMapOvr>
-    <a:masterClrMapping/>
-  </p:clrMapOvr>
-</p:notes>
-</file>
-
-<file path=ppt/notesSlides/notesSlide9.xml><?xml version="1.0" encoding="utf-8"?>
-<p:notes xmlns:a="http://schemas.openxmlformats.org/drawingml/2006/main" xmlns:p="http://schemas.openxmlformats.org/presentationml/2006/main" xmlns:r="http://schemas.openxmlformats.org/officeDocument/2006/relationships">
-  <p:cSld>
-    <p:spTree>
-      <p:nvGrpSpPr>
-        <p:cNvPr id="1" name=""/>
-        <p:cNvGrpSpPr/>
-        <p:nvPr/>
-      </p:nvGrpSpPr>
-      <p:grpSpPr>
-        <a:xfrm>
-          <a:off x="0" y="0"/>
-          <a:ext cx="0" cy="0"/>
-          <a:chOff x="0" y="0"/>
-          <a:chExt cx="0" cy="0"/>
-        </a:xfrm>
-      </p:grpSpPr>
-      <p:sp>
-        <p:nvSpPr>
-          <p:cNvPr id="2" name="讲课提示"/>
-          <p:cNvSpPr txBox="1"/>
-          <p:nvPr/>
-        </p:nvSpPr>
-        <p:spPr>
-          <a:xfrm>
-            <a:off x="457200" y="457200"/>
-            <a:ext cx="6858000" cy="4800600"/>
-          </a:xfrm>
-          <a:prstGeom prst="rect">
-            <a:avLst/>
-          </a:prstGeom>
-        </p:spPr>
-        <p:txBody>
-          <a:bodyPr wrap="square"/>
-          <a:lstStyle/>
-          <a:p>
-            <a:r>
-              <a:rPr lang="zh-CN" dirty="0"/>
-              <a:t>第 111 节 · 核心知识点：综合项目与阶段 2 收尾</a:t>
-            </a:r>
-          </a:p>
-          <a:p>
-            <a:r>
-              <a:rPr lang="zh-CN" dirty="0"/>
-              <a:t/>
-            </a:r>
-          </a:p>
-          <a:p>
-            <a:r>
-              <a:rPr lang="zh-CN" dirty="0"/>
-              <a:t>讲这一页时：先让学生说出上节课的结论，再逐块讲要点。</a:t>
-            </a:r>
-          </a:p>
-          <a:p>
-            <a:r>
-              <a:rPr lang="zh-CN" dirty="0"/>
-              <a:t>每讲完一块，问一句「这一步如果写错了，报错会长什么样？」——把错误提前讲。</a:t>
-            </a:r>
-          </a:p>
-          <a:p>
-            <a:r>
-              <a:rPr lang="zh-CN" dirty="0"/>
-              <a:t/>
-            </a:r>
-          </a:p>
-          <a:p>
-            <a:r>
-              <a:rPr lang="zh-CN" dirty="0"/>
-              <a:t>本节目标：任选一个综合项目做完，形成阶段 2 的收尾产出</a:t>
-            </a:r>
-          </a:p>
-          <a:p>
-            <a:r>
-              <a:rPr lang="zh-CN" dirty="0"/>
-              <a:t/>
-            </a:r>
-          </a:p>
-          <a:p>
-            <a:r>
-              <a:rPr lang="zh-CN" dirty="0"/>
-              <a:t>看不到懂的地方，回讲义对应小节读一遍，再回来对着这页复述一次——能讲出来才算真懂。</a:t>
-            </a:r>
-          </a:p>
-        </p:txBody>
-      </p:sp>
-      <p:sp>
-        <p:nvSpPr>
-          <p:cNvPr id="2" name="讲课提示"/>
-          <p:cNvSpPr txBox="1"/>
-          <p:nvPr/>
-        </p:nvSpPr>
-        <p:spPr>
-          <a:xfrm>
-            <a:off x="457200" y="457200"/>
-            <a:ext cx="6858000" cy="4800600"/>
-          </a:xfrm>
-          <a:prstGeom prst="rect">
-            <a:avLst/>
-          </a:prstGeom>
-        </p:spPr>
-        <p:txBody>
-          <a:bodyPr wrap="square"/>
-          <a:lstStyle/>
-          <a:p>
-            <a:r>
-              <a:rPr lang="zh-CN" dirty="0"/>
-              <a:t>第 111 节 · 核心知识点：综合项目与阶段 2 收尾</a:t>
-            </a:r>
-          </a:p>
-          <a:p>
-            <a:r>
-              <a:rPr lang="zh-CN" dirty="0"/>
-              <a:t/>
-            </a:r>
-          </a:p>
-          <a:p>
-            <a:r>
-              <a:rPr lang="zh-CN" dirty="0"/>
-              <a:t>讲这一页时：先让学生说出上节课的结论，再逐块讲要点。</a:t>
-            </a:r>
-          </a:p>
-          <a:p>
-            <a:r>
-              <a:rPr lang="zh-CN" dirty="0"/>
-              <a:t>每讲完一块，问一句「这一步如果写错了，报错会长什么样？」——把错误提前讲。</a:t>
-            </a:r>
-          </a:p>
-          <a:p>
-            <a:r>
-              <a:rPr lang="zh-CN" dirty="0"/>
-              <a:t/>
-            </a:r>
-          </a:p>
-          <a:p>
-            <a:r>
-              <a:rPr lang="zh-CN" dirty="0"/>
-              <a:t>本节目标：任选一个综合项目做完，形成阶段 2 的收尾产出</a:t>
-            </a:r>
-          </a:p>
-          <a:p>
-            <a:r>
-              <a:rPr lang="zh-CN" dirty="0"/>
-              <a:t/>
-            </a:r>
-          </a:p>
-          <a:p>
-            <a:r>
-              <a:rPr lang="zh-CN" dirty="0"/>
-              <a:t>看不到懂的地方，回讲义对应小节读一遍，再回来对着这页复述一次——能讲出来才算真懂。</a:t>
-            </a:r>
-          </a:p>
-        </p:txBody>
-      </p:sp>
-    </p:spTree>
-  </p:cSld>
-  <p:clrMapOvr>
-    <a:masterClrMapping/>
-  </p:clrMapOvr>
-</p:notes>
-</file>
-
 <file path=ppt/slideLayouts/slideLayout1.xml><?xml version="1.0" encoding="utf-8"?>
 <p:sldLayout xmlns:p="http://schemas.openxmlformats.org/presentationml/2006/main" xmlns:a="http://schemas.openxmlformats.org/drawingml/2006/main">
   <p:cSld name="DEFAULT">
@@ -2367,7 +553,7 @@
   <p:cSld>
     <p:spTree>
       <p:nvGrpSpPr>
-        <p:cNvPr id="1" name="" descr="&lt;Slide style={{ width: '1280px', height: '720px', backgroundColor: '#FAFCFE', padding: 0, position: 'relative', overflow: 'hidden' }}&gt;&#13;&#10;    &lt;Box style={{ position: 'absolute', left: 0, top: 0, width: '1280px', height: '150px', background: '#1F5FA8' }} /&gt;&#13;&#10;    &lt;Box style={{ position: 'absolute', left: 64, top: 34, width: '1152px', flexDirection: 'column' }}&gt;&#13;&#10;        &lt;Text style={{ fontSize: 15, fontWeight: 'bold', color: '#BFD9F2', letterSpacing: 2 }}&gt;阶段 2 · 单元 21&lt;/Text&gt;&#13;&#10;        &lt;Text style={{ fontSize: 38, fontWeight: 'bold', color: '#FFFFFF', marginTop: 6 }}&gt;阶段 2 综合 + 关卡 2 验收&lt;/Text&gt;&#13;&#10;    &lt;/Box&gt;&#13;&#10;    &lt;Box style={{ position: 'absolute', left: 64, top: 168, width: '1152px', height: 470 }}&gt;&#13;&#10;        &lt;svg width='1152' height='470' viewBox='0 0 1152 470'&gt;&#13;&#10;            &lt;text x='0' y='18' fontSize='15' fontWeight='bold' fill='#16232E' fontFamily='Microsoft YaHei'&gt;本单元共 4 节课&lt;/text&gt;&#13;&#10;            &lt;rect x='0' y='196' width='1152' height='38' rx='7' fill='#FFFFFF' /&gt;&lt;text x='16' y='221' fontSize='15' fontWeight='bold' fill='#1F5FA8' fontFamily='Microsoft YaHei'&gt;第 108 节&lt;/text&gt;&lt;text x='96' y='221' fontSize='15' fill='#16232E' fontFamily='Microsoft YaHei'&gt;工程流程回顾与技术地图&lt;/text&gt;&lt;text x='1080' y='221' fontSize='13' fill='#5A6B7A' textAnchor='end' fontFamily='Microsoft YaHei'&gt;W28&lt;/text&gt;&lt;rect x='0' y='238' width='1152' height='38' rx='7' fill='#F2F7FD' /&gt;&lt;text x='16' y='263' fontSize='15' fontWeight='bold' fill='#1F5FA8' fontFamily='Microsoft YaHei'&gt;第 109 节&lt;/text&gt;&lt;text x='96' y='263' fontSize='15' fill='#16232E' fontFamily='Microsoft YaHei'&gt;能力跃迁与工程问题速查&lt;/text&gt;&lt;text x='1080' y='263' fontSize='13' fill='#5A6B7A' textAnchor='end' fontFamily='Microsoft YaHei'&gt;W28&lt;/text&gt;&lt;rect x='0' y='280' width='1152' height='38' rx='7' fill='#FFFFFF' /&gt;&lt;text x='16' y='305' fontSize='15' fontWeight='bold' fill='#1F5FA8' fontFamily='Microsoft YaHei'&gt;第 110 节&lt;/text&gt;&lt;text x='96' y='305' fontSize='15' fill='#16232E' fontFamily='Microsoft YaHei'&gt;★ 关卡 2 五项逐条自测&lt;/text&gt;&lt;text x='1080' y='305' fontSize='13' fill='#5A6B7A' textAnchor='end' fontFamily='Microsoft YaHei'&gt;W28&lt;/text&gt;&lt;rect x='0' y='322' width='1152' height='38' rx='7' fill='#F2F7FD' /&gt;&lt;text x='16' y='347' fontSize='15' fontWeight='bold' fill='#1F5FA8' fontFamily='Microsoft YaHei'&gt;第 111 节&lt;/text&gt;&lt;text x='96' y='347' fontSize='15' fill='#16232E' fontFamily='Microsoft YaHei'&gt;综合项目与阶段 2 收尾&lt;/text&gt;&lt;text x='1080' y='347' fontSize='13' fill='#5A6B7A' textAnchor='end' fontFamily='Microsoft YaHei'&gt;W28&lt;/text&gt;&#13;&#10;        &lt;/svg&gt;&#13;&#10;    &lt;/Box&gt;&#13;&#10;    &lt;Box style={{ position: 'absolute', left: 64, bottom: 22, width: '1152px', flexDirection: 'row', justifyContent: 'space-between' }}&gt;&#13;&#10;        &lt;Text style={{ fontSize: 13, color: '#8A9AAA' }}&gt;Python 讲授课件 · 逐节版&lt;/Text&gt;&#13;&#10;        &lt;Text style={{ fontSize: 13, color: '#8A9AAA' }}&gt;单元 21 · 封面&lt;/Text&gt;&#13;&#10;    &lt;/Box&gt;&#13;&#10;&lt;/Slide&gt;&#13;&#10;"/>
+        <p:cNvPr id="1" name="" descr="&lt;Slide style={{ width: '1280px', height: '720px', backgroundColor: '#FAFCFE', padding: 0, position: 'relative', overflow: 'hidden' }}&gt;&#13;&#10;    &lt;Box style={{ position: 'absolute', left: 0, top: 0, width: '1280px', height: '150px', background: '#1F5FA8' }} /&gt;&#13;&#10;    &lt;Box style={{ position: 'absolute', left: 64, top: 34, width: '1152px', flexDirection: 'column' }}&gt;&#13;&#10;        &lt;Text style={{ fontSize: 15, fontWeight: 'bold', color: '#BFD9F2', letterSpacing: 2 }}&gt;阶段 2 · 单元 21&lt;/Text&gt;&#13;&#10;        &lt;Text style={{ fontSize: 38, fontWeight: 'bold', color: '#FFFFFF', marginTop: 6 }}&gt;阶段 2 综合 + 关卡 2 验收&lt;/Text&gt;&#13;&#10;    &lt;/Box&gt;&#13;&#10;    &lt;Box style={{ position: 'absolute', left: 64, top: 168, width: '1152px', height: 470 }}&gt;&#13;&#10;        &lt;svg width='1152' height='470' viewBox='0 0 1152 470'&gt;&#13;&#10;            &lt;text x='0' y='18' fontSize='15' fontWeight='bold' fill='#16232E' fontFamily='Microsoft YaHei'&gt;本单元共 4 节课&lt;/text&gt;&#13;&#10;            &lt;rect x='0' y='56.0' width='1152' height='48.0' rx='7' fill='#FFFFFF' /&gt;&lt;text x='16' y='85.0' fontSize='15' fontWeight='bold' fill='#1F5FA8' fontFamily='Microsoft YaHei'&gt;第 108 节&lt;/text&gt;&lt;text x='96' y='85.0' fontSize='15' fill='#16232E' fontFamily='Microsoft YaHei'&gt;工程流程回顾与技术地图&lt;/text&gt;&lt;text x='1080' y='85.0' fontSize='13' fill='#5A6B7A' textAnchor='end' fontFamily='Microsoft YaHei'&gt;W28&lt;/text&gt;&lt;rect x='0' y='155.0' width='1152' height='48.0' rx='7' fill='#F2F7FD' /&gt;&lt;text x='16' y='184.0' fontSize='15' fontWeight='bold' fill='#1F5FA8' fontFamily='Microsoft YaHei'&gt;第 109 节&lt;/text&gt;&lt;text x='96' y='184.0' fontSize='15' fill='#16232E' fontFamily='Microsoft YaHei'&gt;能力跃迁与工程问题速查&lt;/text&gt;&lt;text x='1080' y='184.0' fontSize='13' fill='#5A6B7A' textAnchor='end' fontFamily='Microsoft YaHei'&gt;W28&lt;/text&gt;&lt;rect x='0' y='254.0' width='1152' height='48.0' rx='7' fill='#FFFFFF' /&gt;&lt;text x='16' y='283.0' fontSize='15' fontWeight='bold' fill='#1F5FA8' fontFamily='Microsoft YaHei'&gt;第 110 节&lt;/text&gt;&lt;text x='96' y='283.0' fontSize='15' fill='#16232E' fontFamily='Microsoft YaHei'&gt;★ 关卡 2 五项逐条自测&lt;/text&gt;&lt;text x='1080' y='283.0' fontSize='13' fill='#5A6B7A' textAnchor='end' fontFamily='Microsoft YaHei'&gt;W28&lt;/text&gt;&lt;rect x='0' y='353.0' width='1152' height='48.0' rx='7' fill='#F2F7FD' /&gt;&lt;text x='16' y='382.0' fontSize='15' fontWeight='bold' fill='#1F5FA8' fontFamily='Microsoft YaHei'&gt;第 111 节&lt;/text&gt;&lt;text x='96' y='382.0' fontSize='15' fill='#16232E' fontFamily='Microsoft YaHei'&gt;综合项目与阶段 2 收尾&lt;/text&gt;&lt;text x='1080' y='382.0' fontSize='13' fill='#5A6B7A' textAnchor='end' fontFamily='Microsoft YaHei'&gt;W28&lt;/text&gt;&#13;&#10;        &lt;/svg&gt;&#13;&#10;    &lt;/Box&gt;&#13;&#10;    &lt;Box style={{ position: 'absolute', left: 64, bottom: 22, width: '1152px', flexDirection: 'row', justifyContent: 'space-between' }}&gt;&#13;&#10;        &lt;Text style={{ fontSize: 13, color: '#8A9AAA' }}&gt;Python 讲授课件 · 逐节版&lt;/Text&gt;&#13;&#10;        &lt;Text style={{ fontSize: 13, color: '#8A9AAA' }}&gt;单元 21 · 封面&lt;/Text&gt;&#13;&#10;    &lt;/Box&gt;&#13;&#10;&lt;/Slide&gt;&#13;&#10;"/>
         <p:cNvGrpSpPr/>
         <p:nvPr/>
       </p:nvGrpSpPr>
@@ -3591,7 +1777,7 @@
   <p:cSld>
     <p:spTree>
       <p:nvGrpSpPr>
-        <p:cNvPr id="29" name="" descr="&lt;Slide style={{ width: '1280px', height: '720px', backgroundColor: '#FAFCFE', padding: 0, position: 'relative', overflow: 'hidden' }}&gt;&#13;&#10;    &lt;Box style={{ position: 'absolute', left: 64, top: 36, width: '1152px', flexDirection: 'row', alignItems: 'center', gap: 12 }}&gt;&#13;&#10;        &lt;Box style={{ background: '#0E9B78', borderRadius: 5, padding: '3px 11px' }}&gt;&#13;&#10;            &lt;Text style={{ fontSize: 14, fontWeight: 'bold', color: '#FFFFFF' }}&gt;第 108 节&lt;/Text&gt;&#13;&#10;        &lt;/Box&gt;&#13;&#10;        &lt;Text style={{ fontSize: 30, fontWeight: 'bold', color: '#16232E' }}&gt;核心知识点&lt;/Text&gt;&#13;&#10;        &lt;Text style={{ fontSize: 15, color: '#5A6B7A', marginTop: 10 }}&gt;· 工程流程回顾与技术地图&lt;/Text&gt;&#13;&#10;    &lt;/Box&gt;&#13;&#10;    &lt;Box style={{ position: 'absolute', left: 0, top: 0, width: '1280px', height: '720px' }}&gt;&#13;&#10;        &lt;svg width='1280' height='720' viewBox='0 0 1280 720'&gt;&#13;&#10;            &lt;rect x='64' y='96' width='548' height='330' rx='12' fill='#FFFFFF' stroke='#D8E3EE' /&gt;&lt;rect x='64' y='96' width='548' height='4' rx='2' fill='#1F5FA8' /&gt;&lt;text x='82' y='130' fontSize='15.5' fontWeight='bold' fill='#1F5FA8' textAnchor='start' fontFamily='Microsoft YaHei'&gt;2.1 三个项目的工程流程回顾&lt;/text&gt;&lt;text x='82' y='169.0' fontSize='13' fill='#3A4A58' textAnchor='start' fontFamily='Microsoft YaHei'&gt;· 三个项目长得完全不同（游戏、可视化脚本、Web 应用），但流程是同一条：&lt;/text&gt;&lt;rect x='668' y='96' width='548' height='330' rx='12' fill='#FFFFFF' stroke='#D8E3EE' /&gt;&lt;rect x='668' y='96' width='548' height='4' rx='2' fill='#1F5FA8' /&gt;&lt;text x='686' y='130' fontSize='15.5' fontWeight='bold' fill='#1F5FA8' textAnchor='start' fontFamily='Microsoft YaHei'&gt;2.2 三个项目的技术地图&lt;/text&gt;&lt;text x='686' y='169.0' fontSize='13' fill='#3A4A58' textAnchor='start' fontFamily='Microsoft YaHei'&gt;· 这张表回答的是：我这两个阶段到底学到了什么、这些东西各自解决了什么问题。&lt;/text&gt;&lt;rect x='64' y='574' width='1152' height='66' rx='12' fill='#EEF5FB' /&gt;&lt;text x='84' y='616' fontSize='14' fill='#243444' textAnchor='start' fontFamily='Microsoft YaHei'&gt;看不懂的地方先回讲义对应小节读一遍，再回来对着这页复述一次——能讲出来才算真懂。&lt;/text&gt;&#13;&#10;            &lt;text x='64' y='684' fontSize='13' fill='#8A9AAA' fontFamily='Microsoft YaHei'&gt;Python 讲授课件 · 逐节版&lt;/text&gt;&#13;&#10;            &lt;text x='1216' y='684' fontSize='13' fill='#8A9AAA' textAnchor='end' fontFamily='Microsoft YaHei'&gt;单元 21 · 第 108 节&lt;/text&gt;&#13;&#10;        &lt;/svg&gt;&#13;&#10;    &lt;/Box&gt;&#13;&#10;&lt;/Slide&gt;&#13;&#10;"/>
+        <p:cNvPr id="29" name="" descr="&lt;Slide style={{ width: '1280px', height: '720px', backgroundColor: '#FAFCFE', padding: 0, position: 'relative', overflow: 'hidden' }}&gt;&#13;&#10;    &lt;Box style={{ position: 'absolute', left: 64, top: 36, width: '1152px', flexDirection: 'row', alignItems: 'center', gap: 12 }}&gt;&#13;&#10;        &lt;Box style={{ background: '#0E9B78', borderRadius: 5, padding: '3px 11px' }}&gt;&#13;&#10;            &lt;Text style={{ fontSize: 14, fontWeight: 'bold', color: '#FFFFFF' }}&gt;第 108 节&lt;/Text&gt;&#13;&#10;        &lt;/Box&gt;&#13;&#10;        &lt;Text style={{ fontSize: 30, fontWeight: 'bold', color: '#16232E' }}&gt;核心知识点&lt;/Text&gt;&#13;&#10;        &lt;Text style={{ fontSize: 15, color: '#5A6B7A', marginTop: 10 }}&gt;· 工程流程回顾与技术地图&lt;/Text&gt;&#13;&#10;    &lt;/Box&gt;&#13;&#10;    &lt;Box style={{ position: 'absolute', left: 0, top: 0, width: '1280px', height: '720px' }}&gt;&#13;&#10;        &lt;svg width='1280' height='720' viewBox='0 0 1280 720'&gt;&#13;&#10;            &lt;rect x='64' y='96' width='548' height='330' rx='12' fill='#FFFFFF' stroke='#D8E3EE' /&gt;&lt;rect x='64' y='96' width='548' height='4' rx='2' fill='#1F5FA8' /&gt;&lt;text x='82' y='130' fontSize='15.5' fontWeight='bold' fill='#1F5FA8' textAnchor='start' fontFamily='Microsoft YaHei'&gt;2.1 三个项目的工程流程回顾&lt;/text&gt;&lt;text x='82' y='169.0' fontSize='13' fill='#3A4A58' textAnchor='start' fontFamily='Microsoft YaHei'&gt;· ★ 为什么这条流程比「跟着敲完」重要 10 倍：跟着敲完，&lt;/text&gt;&lt;text x='82' y='188.5' fontSize='13' fill='#3A4A58' textAnchor='start' fontFamily='Microsoft YaHei'&gt;你得到的是一个能跑的程序；走完这条流程…&lt;/text&gt;&lt;text x='82' y='217.0' fontSize='13' fill='#3A4A58' textAnchor='start' fontFamily='Microsoft YaHei'&gt;· 实跑结果是 3 条合格、2 条不合格：update 被抓出三个问题（太短、没信息量、&lt;/text&gt;&lt;text x='82' y='236.5' fontSize='13' fill='#3A4A58' textAnchor='start' fontFamily='Microsoft YaHei'&gt;首字母小写）…&lt;/text&gt;&lt;rect x='668' y='96' width='548' height='330' rx='12' fill='#FFFFFF' stroke='#D8E3EE' /&gt;&lt;rect x='668' y='96' width='548' height='4' rx='2' fill='#1F5FA8' /&gt;&lt;text x='686' y='130' fontSize='15.5' fontWeight='bold' fill='#1F5FA8' textAnchor='start' fontFamily='Microsoft YaHei'&gt;2.2 三个项目的技术地图&lt;/text&gt;&lt;text x='686' y='169.0' fontSize='13' fill='#3A4A58' textAnchor='start' fontFamily='Microsoft YaHei'&gt;· 我这两个阶段到底学到了什么、这些东西各自解决了什么问题。&lt;/text&gt;&lt;text x='686' y='197.5' fontSize='13' fill='#3A4A58' textAnchor='start' fontFamily='Microsoft YaHei'&gt;· ★ 读陌生代码时这张表就是「地图」：先猜项目属于哪一类，&lt;/text&gt;&lt;text x='686' y='217.0' fontSize='13' fill='#3A4A58' textAnchor='start' fontFamily='Microsoft YaHei'&gt;再去找对应的那一行技术。&lt;/text&gt;&lt;text x='686' y='245.5' fontSize='13' fill='#3A4A58' textAnchor='start' fontFamily='Microsoft YaHei'&gt;· GAME 里那份代码只命中 pygame.event.get(…&lt;/text&gt;&lt;rect x='64' y='574' width='1152' height='66' rx='12' fill='#EEF5FB' /&gt;&lt;text x='84' y='616' fontSize='14' fill='#243444' textAnchor='start' fontFamily='Microsoft YaHei'&gt;看不懂的地方先回讲义对应小节读一遍，再回来对着这页复述一次——能讲出来才算真懂。&lt;/text&gt;&#13;&#10;            &lt;text x='64' y='684' fontSize='13' fill='#8A9AAA' fontFamily='Microsoft YaHei'&gt;Python 讲授课件 · 逐节版&lt;/text&gt;&#13;&#10;            &lt;text x='1216' y='684' fontSize='13' fill='#8A9AAA' textAnchor='end' fontFamily='Microsoft YaHei'&gt;单元 21 · 第 108 节&lt;/text&gt;&#13;&#10;        &lt;/svg&gt;&#13;&#10;    &lt;/Box&gt;&#13;&#10;&lt;/Slide&gt;&#13;&#10;"/>
         <p:cNvGrpSpPr/>
         <p:nvPr/>
       </p:nvGrpSpPr>
@@ -4022,7 +2208,7 @@
   <p:cSld>
     <p:spTree>
       <p:nvGrpSpPr>
-        <p:cNvPr id="42" name="" descr="&lt;Slide style={{ width: '1280px', height: '720px', backgroundColor: '#FAFCFE', padding: 0, position: 'relative', overflow: 'hidden' }}&gt;&#13;&#10;    &lt;Box style={{ position: 'absolute', left: 64, top: 36, width: '1152px', flexDirection: 'row', alignItems: 'center', gap: 12 }}&gt;&#13;&#10;        &lt;Box style={{ background: '#0E9B78', borderRadius: 5, padding: '3px 11px' }}&gt;&#13;&#10;            &lt;Text style={{ fontSize: 14, fontWeight: 'bold', color: '#FFFFFF' }}&gt;第 109 节&lt;/Text&gt;&#13;&#10;        &lt;/Box&gt;&#13;&#10;        &lt;Text style={{ fontSize: 30, fontWeight: 'bold', color: '#16232E' }}&gt;核心知识点&lt;/Text&gt;&#13;&#10;        &lt;Text style={{ fontSize: 15, color: '#5A6B7A', marginTop: 10 }}&gt;· 能力跃迁与工程问题速查&lt;/Text&gt;&#13;&#10;    &lt;/Box&gt;&#13;&#10;    &lt;Box style={{ position: 'absolute', left: 0, top: 0, width: '1280px', height: '720px' }}&gt;&#13;&#10;        &lt;svg width='1280' height='720' viewBox='0 0 1280 720'&gt;&#13;&#10;            &lt;rect x='64' y='96' width='548' height='330' rx='12' fill='#FFFFFF' stroke='#D8E3EE' /&gt;&lt;rect x='64' y='96' width='548' height='4' rx='2' fill='#1F5FA8' /&gt;&lt;text x='82' y='130' fontSize='15.5' fontWeight='bold' fill='#1F5FA8' textAnchor='start' fontFamily='Microsoft YaHei'&gt;2.3 阶段 1 → 阶段 2 的能力跃迁&lt;/text&gt;&lt;text x='82' y='169.0' fontSize='13' fill='#3A4A58' textAnchor='start' fontFamily='Microsoft YaHei'&gt;· 标准一：单文件不超过 300 行。 超了按「谁在调用它」拆：&lt;/text&gt;&lt;text x='82' y='197.5' fontSize='13' fill='#3A4A58' textAnchor='start' fontFamily='Microsoft YaHei'&gt;· 标准二：配置与逻辑分离。 判据很简单：代码里出现一个&quot;魔法数字&quot;或&quot;魔法字符串&quot;，&lt;/text&gt;&lt;text x='82' y='217.0' fontSize='13' fill='#3A4A58' textAnchor='start' fontFamily='Microsoft YaHei'&gt;就应该考虑搬到配置文…&lt;/text&gt;&lt;rect x='668' y='96' width='548' height='330' rx='12' fill='#FFFFFF' stroke='#D8E3EE' /&gt;&lt;rect x='668' y='96' width='548' height='4' rx='2' fill='#1F5FA8' /&gt;&lt;text x='686' y='130' fontSize='15.5' fontWeight='bold' fill='#1F5FA8' textAnchor='start' fontFamily='Microsoft YaHei'&gt;2.4 常见工程问题速查&lt;/text&gt;&lt;text x='686' y='169.0' fontSize='13' fill='#3A4A58' textAnchor='start' fontFamily='Microsoft YaHei'&gt;· 问题一：依赖怎么锁？ 在虚拟环境里执行 pip freeze ＞ requirements.txt，别…&lt;/text&gt;&lt;text x='686' y='197.5' fontSize='13' fill='#3A4A58' textAnchor='start' fontFamily='Microsoft YaHei'&gt;· 问题二：密钥怎么不提交？ 一行口令：密钥只从环境变量读，永远不写进代码。&lt;/text&gt;&lt;text x='686' y='226.0' fontSize='13' fill='#3A4A58' textAnchor='start' fontFamily='Microsoft YaHei'&gt;· 问题三：数据库怎么备份？ SQLite 就是一个文件，sqlite3 db.sqlite3 .back…&lt;/text&gt;&lt;rect x='64' y='574' width='1152' height='66' rx='12' fill='#EEF5FB' /&gt;&lt;text x='84' y='616' fontSize='14' fill='#243444' textAnchor='start' fontFamily='Microsoft YaHei'&gt;看不懂的地方先回讲义对应小节读一遍，再回来对着这页复述一次——能讲出来才算真懂。&lt;/text&gt;&#13;&#10;            &lt;text x='64' y='684' fontSize='13' fill='#8A9AAA' fontFamily='Microsoft YaHei'&gt;Python 讲授课件 · 逐节版&lt;/text&gt;&#13;&#10;            &lt;text x='1216' y='684' fontSize='13' fill='#8A9AAA' textAnchor='end' fontFamily='Microsoft YaHei'&gt;单元 21 · 第 109 节&lt;/text&gt;&#13;&#10;        &lt;/svg&gt;&#13;&#10;    &lt;/Box&gt;&#13;&#10;&lt;/Slide&gt;&#13;&#10;"/>
+        <p:cNvPr id="42" name="" descr="&lt;Slide style={{ width: '1280px', height: '720px', backgroundColor: '#FAFCFE', padding: 0, position: 'relative', overflow: 'hidden' }}&gt;&#13;&#10;    &lt;Box style={{ position: 'absolute', left: 64, top: 36, width: '1152px', flexDirection: 'row', alignItems: 'center', gap: 12 }}&gt;&#13;&#10;        &lt;Box style={{ background: '#0E9B78', borderRadius: 5, padding: '3px 11px' }}&gt;&#13;&#10;            &lt;Text style={{ fontSize: 14, fontWeight: 'bold', color: '#FFFFFF' }}&gt;第 109 节&lt;/Text&gt;&#13;&#10;        &lt;/Box&gt;&#13;&#10;        &lt;Text style={{ fontSize: 30, fontWeight: 'bold', color: '#16232E' }}&gt;核心知识点&lt;/Text&gt;&#13;&#10;        &lt;Text style={{ fontSize: 15, color: '#5A6B7A', marginTop: 10 }}&gt;· 能力跃迁与工程问题速查&lt;/Text&gt;&#13;&#10;    &lt;/Box&gt;&#13;&#10;    &lt;Box style={{ position: 'absolute', left: 0, top: 0, width: '1280px', height: '720px' }}&gt;&#13;&#10;        &lt;svg width='1280' height='720' viewBox='0 0 1280 720'&gt;&#13;&#10;            &lt;rect x='64' y='96' width='548' height='330' rx='12' fill='#FFFFFF' stroke='#D8E3EE' /&gt;&lt;rect x='64' y='96' width='548' height='4' rx='2' fill='#1F5FA8' /&gt;&lt;text x='82' y='130' fontSize='15.5' fontWeight='bold' fill='#1F5FA8' textAnchor='start' fontFamily='Microsoft YaHei'&gt;2.3 阶段 1 → 阶段 2 的能力跃迁&lt;/text&gt;&lt;text x='82' y='169.0' fontSize='13' fill='#3A4A58' textAnchor='start' fontFamily='Microsoft YaHei'&gt;· 标准一：单文件不超过 300 行。&lt;/text&gt;&lt;text x='82' y='197.5' fontSize='13' fill='#3A4A58' textAnchor='start' fontFamily='Microsoft YaHei'&gt;· 标准二：配置与逻辑分离。&lt;/text&gt;&lt;rect x='668' y='96' width='548' height='330' rx='12' fill='#FFFFFF' stroke='#D8E3EE' /&gt;&lt;rect x='668' y='96' width='548' height='4' rx='2' fill='#1F5FA8' /&gt;&lt;text x='686' y='130' fontSize='15.5' fontWeight='bold' fill='#1F5FA8' textAnchor='start' fontFamily='Microsoft YaHei'&gt;2.4 常见工程问题速查&lt;/text&gt;&lt;text x='686' y='169.0' fontSize='13' fill='#3A4A58' textAnchor='start' fontFamily='Microsoft YaHei'&gt;· 问题一：依赖怎么锁？&lt;/text&gt;&lt;text x='686' y='197.5' fontSize='13' fill='#3A4A58' textAnchor='start' fontFamily='Microsoft YaHei'&gt;· 问题二：密钥怎么不提交？&lt;/text&gt;&lt;text x='686' y='226.0' fontSize='13' fill='#3A4A58' textAnchor='start' fontFamily='Microsoft YaHei'&gt;· 问题三：数据库怎么备份？&lt;/text&gt;&lt;rect x='64' y='574' width='1152' height='66' rx='12' fill='#EEF5FB' /&gt;&lt;text x='84' y='616' fontSize='14' fill='#243444' textAnchor='start' fontFamily='Microsoft YaHei'&gt;看不懂的地方先回讲义对应小节读一遍，再回来对着这页复述一次——能讲出来才算真懂。&lt;/text&gt;&#13;&#10;            &lt;text x='64' y='684' fontSize='13' fill='#8A9AAA' fontFamily='Microsoft YaHei'&gt;Python 讲授课件 · 逐节版&lt;/text&gt;&#13;&#10;            &lt;text x='1216' y='684' fontSize='13' fill='#8A9AAA' textAnchor='end' fontFamily='Microsoft YaHei'&gt;单元 21 · 第 109 节&lt;/text&gt;&#13;&#10;        &lt;/svg&gt;&#13;&#10;    &lt;/Box&gt;&#13;&#10;&lt;/Slide&gt;&#13;&#10;"/>
         <p:cNvGrpSpPr/>
         <p:nvPr/>
       </p:nvGrpSpPr>
@@ -4483,7 +2669,7 @@
   <p:cSld>
     <p:spTree>
       <p:nvGrpSpPr>
-        <p:cNvPr id="55" name="" descr="&lt;Slide style={{ width: '1280px', height: '720px', backgroundColor: '#FAFCFE', padding: 0, position: 'relative', overflow: 'hidden' }}&gt;&#13;&#10;    &lt;Box style={{ position: 'absolute', left: 64, top: 36, width: '1152px', flexDirection: 'row', alignItems: 'center', gap: 12 }}&gt;&#13;&#10;        &lt;Box style={{ background: '#0E9B78', borderRadius: 5, padding: '3px 11px' }}&gt;&#13;&#10;            &lt;Text style={{ fontSize: 14, fontWeight: 'bold', color: '#FFFFFF' }}&gt;第 110 节&lt;/Text&gt;&#13;&#10;        &lt;/Box&gt;&#13;&#10;        &lt;Text style={{ fontSize: 30, fontWeight: 'bold', color: '#16232E' }}&gt;核心知识点&lt;/Text&gt;&#13;&#10;        &lt;Text style={{ fontSize: 15, color: '#5A6B7A', marginTop: 10 }}&gt;· ★ 关卡 2 五项逐条自测&lt;/Text&gt;&#13;&#10;    &lt;/Box&gt;&#13;&#10;    &lt;Box style={{ position: 'absolute', left: 0, top: 0, width: '1280px', height: '720px' }}&gt;&#13;&#10;        &lt;svg width='1280' height='720' viewBox='0 0 1280 720'&gt;&#13;&#10;            &lt;rect x='64' y='96' width='548' height='330' rx='12' fill='#FFFFFF' stroke='#D8E3EE' /&gt;&lt;rect x='64' y='96' width='548' height='4' rx='2' fill='#1F5FA8' /&gt;&lt;text x='82' y='130' fontSize='15.5' fontWeight='bold' fill='#1F5FA8' textAnchor='start' fontFamily='Microsoft YaHei'&gt;2.5 关卡 2 的五条硬指标&lt;/text&gt;&lt;text x='82' y='169.0' fontSize='13' fill='#3A4A58' textAnchor='start' fontFamily='Microsoft YaHei'&gt;· 先讲「为什么是这五条」，第八节再展开验收细则。五条分别对应五种能力：&lt;/text&gt;&lt;rect x='668' y='96' width='548' height='330' rx='12' fill='#FFFFFF' stroke='#D8E3EE' /&gt;&lt;rect x='668' y='96' width='548' height='4' rx='2' fill='#1F5FA8' /&gt;&lt;text x='686' y='130' fontSize='15.5' fontWeight='bold' fill='#1F5FA8' textAnchor='start' fontFamily='Microsoft YaHei'&gt;2.6 下一步方向选择&lt;/text&gt;&lt;text x='686' y='169.0' fontSize='13' fill='#3A4A58' textAnchor='start' fontFamily='Microsoft YaHei'&gt;· 阶段 2 到此结束，接下来不必全都学。选一条主攻，其余当备用。&lt;/text&gt;&lt;text x='64' y='470' fontSize='14.5' fontWeight='bold' fill='#0E9B78' textAnchor='start' fontFamily='Microsoft YaHei'&gt;本节的代码示例&lt;/text&gt;&lt;text x='64' y='500' fontSize='13' fill='#3A4A58' textAnchor='start' fontFamily='Microsoft YaHei'&gt;· 项目目录体检脚本（project_doctor.py）&lt;/text&gt;&lt;text x='468' y='500' fontSize='13' fill='#3A4A58' textAnchor='start' fontFamily='Microsoft YaHei'&gt;· requirements.txt 自动生成（make_requir…&lt;/text&gt;&lt;text x='872' y='500' fontSize='13' fill='#3A4A58' textAnchor='start' fontFamily='Microsoft YaHei'&gt;· 代码规模与圈复杂度提示（code_metrics.py）&lt;/text&gt;&lt;rect x='64' y='574' width='1152' height='66' rx='12' fill='#EEF5FB' /&gt;&lt;text x='84' y='616' fontSize='14' fill='#243444' textAnchor='start' fontFamily='Microsoft YaHei'&gt;看不懂的地方先回讲义对应小节读一遍，再回来对着这页复述一次——能讲出来才算真懂。&lt;/text&gt;&#13;&#10;            &lt;text x='64' y='684' fontSize='13' fill='#8A9AAA' fontFamily='Microsoft YaHei'&gt;Python 讲授课件 · 逐节版&lt;/text&gt;&#13;&#10;            &lt;text x='1216' y='684' fontSize='13' fill='#8A9AAA' textAnchor='end' fontFamily='Microsoft YaHei'&gt;单元 21 · 第 110 节&lt;/text&gt;&#13;&#10;        &lt;/svg&gt;&#13;&#10;    &lt;/Box&gt;&#13;&#10;&lt;/Slide&gt;&#13;&#10;"/>
+        <p:cNvPr id="55" name="" descr="&lt;Slide style={{ width: '1280px', height: '720px', backgroundColor: '#FAFCFE', padding: 0, position: 'relative', overflow: 'hidden' }}&gt;&#13;&#10;    &lt;Box style={{ position: 'absolute', left: 64, top: 36, width: '1152px', flexDirection: 'row', alignItems: 'center', gap: 12 }}&gt;&#13;&#10;        &lt;Box style={{ background: '#0E9B78', borderRadius: 5, padding: '3px 11px' }}&gt;&#13;&#10;            &lt;Text style={{ fontSize: 14, fontWeight: 'bold', color: '#FFFFFF' }}&gt;第 110 节&lt;/Text&gt;&#13;&#10;        &lt;/Box&gt;&#13;&#10;        &lt;Text style={{ fontSize: 30, fontWeight: 'bold', color: '#16232E' }}&gt;核心知识点&lt;/Text&gt;&#13;&#10;        &lt;Text style={{ fontSize: 15, color: '#5A6B7A', marginTop: 10 }}&gt;· ★ 关卡 2 五项逐条自测&lt;/Text&gt;&#13;&#10;    &lt;/Box&gt;&#13;&#10;    &lt;Box style={{ position: 'absolute', left: 0, top: 0, width: '1280px', height: '720px' }}&gt;&#13;&#10;        &lt;svg width='1280' height='720' viewBox='0 0 1280 720'&gt;&#13;&#10;            &lt;rect x='64' y='96' width='548' height='330' rx='12' fill='#FFFFFF' stroke='#D8E3EE' /&gt;&lt;rect x='64' y='96' width='548' height='4' rx='2' fill='#1F5FA8' /&gt;&lt;text x='82' y='130' fontSize='15.5' fontWeight='bold' fill='#1F5FA8' textAnchor='start' fontFamily='Microsoft YaHei'&gt;2.5 关卡 2 的五条硬指标&lt;/text&gt;&lt;text x='82' y='169.0' fontSize='13' fill='#3A4A58' textAnchor='start' fontFamily='Microsoft YaHei'&gt;· ★ 为什么第 5 条也算硬指标：前四条「做过」就能证明，只有第 5 条考「想清楚」。&lt;/text&gt;&lt;text x='82' y='197.5' fontSize='13' fill='#3A4A58' textAnchor='start' fontFamily='Microsoft YaHei'&gt;· 项目能跑但没推仓库 → 练习 21-1；推了但没 README → 必含「是什么 / 怎么装&lt;/text&gt;&lt;text x='82' y='217.0' fontSize='13' fill='#3A4A58' textAnchor='start' fontFamily='Microsoft YaHei'&gt;/ 怎么…&lt;/text&gt;&lt;text x='82' y='245.5' fontSize='13' fill='#3A4A58' textAnchor='start' fontFamily='Microsoft YaHei'&gt;· 这份自评里 3/5 达标、缺第 2、4 条——缺口清单比「差不多了」有用得多…&lt;/text&gt;&lt;rect x='668' y='96' width='548' height='330' rx='12' fill='#FFFFFF' stroke='#D8E3EE' /&gt;&lt;rect x='668' y='96' width='548' height='4' rx='2' fill='#1F5FA8' /&gt;&lt;text x='686' y='130' fontSize='15.5' fontWeight='bold' fill='#1F5FA8' textAnchor='start' fontFamily='Microsoft YaHei'&gt;2.6 下一步方向选择&lt;/text&gt;&lt;text x='686' y='169.0' fontSize='13' fill='#3A4A58' textAnchor='start' fontFamily='Microsoft YaHei'&gt;· 阶段 2 到此结束，接下来不必全都学。&lt;/text&gt;&lt;text x='686' y='197.5' fontSize='13' fill='#3A4A58' textAnchor='start' fontFamily='Microsoft YaHei'&gt;· ① 做项目时最常卡在哪一步？&lt;/text&gt;&lt;text x='686' y='226.0' fontSize='13' fill='#3A4A58' textAnchor='start' fontFamily='Microsoft YaHei'&gt;· 本单元的例子全部只用标准库（ast、pathlib、logging）…&lt;/text&gt;&lt;text x='64' y='470' fontSize='14.5' fontWeight='bold' fill='#0E9B78' textAnchor='start' fontFamily='Microsoft YaHei'&gt;本节的代码示例&lt;/text&gt;&lt;text x='64' y='500' fontSize='13' fill='#3A4A58' textAnchor='start' fontFamily='Microsoft YaHei'&gt;· 项目目录体检脚本（project_doctor.py）&lt;/text&gt;&lt;text x='468' y='500' fontSize='13' fill='#3A4A58' textAnchor='start' fontFamily='Microsoft YaHei'&gt;· requirements.txt 自动生成（make_requir…&lt;/text&gt;&lt;text x='872' y='500' fontSize='13' fill='#3A4A58' textAnchor='start' fontFamily='Microsoft YaHei'&gt;· 代码规模与圈复杂度提示（code_metrics.py）&lt;/text&gt;&lt;rect x='64' y='574' width='1152' height='66' rx='12' fill='#EEF5FB' /&gt;&lt;text x='84' y='616' fontSize='14' fill='#243444' textAnchor='start' fontFamily='Microsoft YaHei'&gt;看不懂的地方先回讲义对应小节读一遍，再回来对着这页复述一次——能讲出来才算真懂。&lt;/text&gt;&#13;&#10;            &lt;text x='64' y='684' fontSize='13' fill='#8A9AAA' fontFamily='Microsoft YaHei'&gt;Python 讲授课件 · 逐节版&lt;/text&gt;&#13;&#10;            &lt;text x='1216' y='684' fontSize='13' fill='#8A9AAA' textAnchor='end' fontFamily='Microsoft YaHei'&gt;单元 21 · 第 110 节&lt;/text&gt;&#13;&#10;        &lt;/svg&gt;&#13;&#10;    &lt;/Box&gt;&#13;&#10;&lt;/Slide&gt;&#13;&#10;"/>
         <p:cNvGrpSpPr/>
         <p:nvPr/>
       </p:nvGrpSpPr>
@@ -4954,7 +3140,7 @@
   <p:cSld>
     <p:spTree>
       <p:nvGrpSpPr>
-        <p:cNvPr id="68" name="" descr="&lt;Slide style={{ width: '1280px', height: '720px', backgroundColor: '#FAFCFE', padding: 0, position: 'relative', overflow: 'hidden' }}&gt;&#13;&#10;    &lt;Box style={{ position: 'absolute', left: 64, top: 36, width: '1152px', flexDirection: 'row', alignItems: 'center', gap: 12 }}&gt;&#13;&#10;        &lt;Box style={{ background: '#0E9B78', borderRadius: 5, padding: '3px 11px' }}&gt;&#13;&#10;            &lt;Text style={{ fontSize: 14, fontWeight: 'bold', color: '#FFFFFF' }}&gt;第 111 节&lt;/Text&gt;&#13;&#10;        &lt;/Box&gt;&#13;&#10;        &lt;Text style={{ fontSize: 30, fontWeight: 'bold', color: '#16232E' }}&gt;核心知识点&lt;/Text&gt;&#13;&#10;        &lt;Text style={{ fontSize: 15, color: '#5A6B7A', marginTop: 10 }}&gt;· 综合项目与阶段 2 收尾&lt;/Text&gt;&#13;&#10;    &lt;/Box&gt;&#13;&#10;    &lt;Box style={{ position: 'absolute', left: 0, top: 0, width: '1280px', height: '720px' }}&gt;&#13;&#10;        &lt;svg width='1280' height='720' viewBox='0 0 1280 720'&gt;&#13;&#10;            &lt;rect x='64' y='96' width='368' height='330' rx='12' fill='#FFFFFF' stroke='#D8E3EE' /&gt;&lt;rect x='64' y='96' width='368' height='4' rx='2' fill='#1F5FA8' /&gt;&lt;text x='82' y='130' fontSize='15.5' fontWeight='bold' fill='#1F5FA8' textAnchor='start' fontFamily='Microsoft YaHei'&gt;基础档&lt;/text&gt;&lt;text x='82' y='169.0' fontSize='13' fill='#3A4A58' textAnchor='start' fontFamily='Microsoft YaHei'&gt;· 练习 21-1【给三个项目补齐工程件】&lt;/text&gt;&lt;text x='82' y='197.5' fontSize='13' fill='#3A4A58' textAnchor='start' fontFamily='Microsoft YaHei'&gt;· 练习 21-2【给自己的函数写 pytest 测试】&lt;/text&gt;&lt;rect x='468' y='96' width='368' height='330' rx='12' fill='#FFFFFF' stroke='#D8E3EE' /&gt;&lt;rect x='468' y='96' width='368' height='4' rx='2' fill='#1F5FA8' /&gt;&lt;text x='486' y='130' fontSize='15.5' fontWeight='bold' fill='#1F5FA8' textAnchor='start' fontFamily='Microsoft YaHei'&gt;进阶档&lt;/text&gt;&lt;text x='486' y='169.0' fontSize='13' fill='#3A4A58' textAnchor='start' fontFamily='Microsoft YaHei'&gt;· 练习 21-3【重构冲刺】&lt;/text&gt;&lt;text x='486' y='197.5' fontSize='13' fill='#3A4A58' textAnchor='start' fontFamily='Microsoft YaHei'&gt;· 练习 21-4【接手一个陌生项目】&lt;/text&gt;&lt;rect x='872' y='96' width='368' height='330' rx='12' fill='#FFFFFF' stroke='#D8E3EE' /&gt;&lt;rect x='872' y='96' width='368' height='4' rx='2' fill='#1F5FA8' /&gt;&lt;text x='890' y='130' fontSize='15.5' fontWeight='bold' fill='#1F5FA8' textAnchor='start' fontFamily='Microsoft YaHei'&gt;参考答案 21-1（三个项目的工程件）&lt;/text&gt;&lt;text x='890' y='169.0' fontSize='13' fill='#3A4A58' textAnchor='start' fontFamily='Microsoft YaHei'&gt;· 怎么装依赖：需要 Python 3.12，执行 pip install &lt;/text&gt;&lt;text x='890' y='188.5' fontSize='13' fill='#3A4A58' textAnchor='start' fontFamily='Microsoft YaHei'&gt;-r requirements…&lt;/text&gt;&lt;text x='890' y='217.0' fontSize='13' fill='#3A4A58' textAnchor='start' fontFamily='Microsoft YaHei'&gt;· 怎么运行：执行 python alien_invasion.py。&lt;/text&gt;&lt;text x='890' y='245.5' fontSize='13' fill='#3A4A58' textAnchor='start' fontFamily='Microsoft YaHei'&gt;· ← → 左右移动，↓ 加速，空格 开火，P 暂停，Q 退&lt;/text&gt;&lt;text x='890' y='265.0' fontSize='13' fill='#3A4A58' textAnchor='start' fontFamily='Microsoft YaHei'&gt;出&lt;/text&gt;&lt;rect x='64' y='574' width='1152' height='66' rx='12' fill='#EEF5FB' /&gt;&lt;text x='84' y='616' fontSize='14' fill='#243444' textAnchor='start' fontFamily='Microsoft YaHei'&gt;看不懂的地方先回讲义对应小节读一遍，再回来对着这页复述一次——能讲出来才算真懂。&lt;/text&gt;&#13;&#10;            &lt;text x='64' y='684' fontSize='13' fill='#8A9AAA' fontFamily='Microsoft YaHei'&gt;Python 讲授课件 · 逐节版&lt;/text&gt;&#13;&#10;            &lt;text x='1216' y='684' fontSize='13' fill='#8A9AAA' textAnchor='end' fontFamily='Microsoft YaHei'&gt;单元 21 · 第 111 节&lt;/text&gt;&#13;&#10;        &lt;/svg&gt;&#13;&#10;    &lt;/Box&gt;&#13;&#10;&lt;/Slide&gt;&#13;&#10;"/>
+        <p:cNvPr id="68" name="" descr="&lt;Slide style={{ width: '1280px', height: '720px', backgroundColor: '#FAFCFE', padding: 0, position: 'relative', overflow: 'hidden' }}&gt;&#13;&#10;    &lt;Box style={{ position: 'absolute', left: 64, top: 36, width: '1152px', flexDirection: 'row', alignItems: 'center', gap: 12 }}&gt;&#13;&#10;        &lt;Box style={{ background: '#0E9B78', borderRadius: 5, padding: '3px 11px' }}&gt;&#13;&#10;            &lt;Text style={{ fontSize: 14, fontWeight: 'bold', color: '#FFFFFF' }}&gt;第 111 节&lt;/Text&gt;&#13;&#10;        &lt;/Box&gt;&#13;&#10;        &lt;Text style={{ fontSize: 30, fontWeight: 'bold', color: '#16232E' }}&gt;核心知识点&lt;/Text&gt;&#13;&#10;        &lt;Text style={{ fontSize: 15, color: '#5A6B7A', marginTop: 10 }}&gt;· 综合项目与阶段 2 收尾&lt;/Text&gt;&#13;&#10;    &lt;/Box&gt;&#13;&#10;    &lt;Box style={{ position: 'absolute', left: 0, top: 0, width: '1280px', height: '720px' }}&gt;&#13;&#10;        &lt;svg width='1280' height='720' viewBox='0 0 1280 720'&gt;&#13;&#10;            &lt;rect x='64' y='96' width='368' height='330' rx='12' fill='#FFFFFF' stroke='#D8E3EE' /&gt;&lt;rect x='64' y='96' width='368' height='4' rx='2' fill='#1F5FA8' /&gt;&lt;text x='82' y='130' fontSize='15.5' fontWeight='bold' fill='#1F5FA8' textAnchor='start' fontFamily='Microsoft YaHei'&gt;基础档&lt;/text&gt;&lt;text x='82' y='169.0' fontSize='13' fill='#3A4A58' textAnchor='start' fontFamily='Microsoft YaHei'&gt;· 练习 21-1【给三个项目补齐工程件】&lt;/text&gt;&lt;text x='82' y='197.5' fontSize='13' fill='#3A4A58' textAnchor='start' fontFamily='Microsoft YaHei'&gt;· 练习 21-2【给自己的函数写 pytest 测试】&lt;/text&gt;&lt;rect x='468' y='96' width='368' height='330' rx='12' fill='#FFFFFF' stroke='#D8E3EE' /&gt;&lt;rect x='468' y='96' width='368' height='4' rx='2' fill='#1F5FA8' /&gt;&lt;text x='486' y='130' fontSize='15.5' fontWeight='bold' fill='#1F5FA8' textAnchor='start' fontFamily='Microsoft YaHei'&gt;进阶档&lt;/text&gt;&lt;text x='486' y='169.0' fontSize='13' fill='#3A4A58' textAnchor='start' fontFamily='Microsoft YaHei'&gt;· 练习 21-3【重构冲刺】&lt;/text&gt;&lt;text x='486' y='197.5' fontSize='13' fill='#3A4A58' textAnchor='start' fontFamily='Microsoft YaHei'&gt;· 练习 21-4【接手一个陌生项目】&lt;/text&gt;&lt;rect x='872' y='96' width='368' height='330' rx='12' fill='#FFFFFF' stroke='#D8E3EE' /&gt;&lt;rect x='872' y='96' width='368' height='4' rx='2' fill='#1F5FA8' /&gt;&lt;text x='890' y='130' fontSize='15.5' fontWeight='bold' fill='#1F5FA8' textAnchor='start' fontFamily='Microsoft YaHei'&gt;参考答案 21-3（重构冲刺前后对比）&lt;/text&gt;&lt;text x='890' y='169.0' fontSize='13' fill='#3A4A58' textAnchor='start' fontFamily='Microsoft YaHei'&gt;· 关于「行数反而变多了」&lt;/text&gt;&lt;rect x='64' y='574' width='1152' height='66' rx='12' fill='#EEF5FB' /&gt;&lt;text x='84' y='616' fontSize='14' fill='#243444' textAnchor='start' fontFamily='Microsoft YaHei'&gt;看不懂的地方先回讲义对应小节读一遍，再回来对着这页复述一次——能讲出来才算真懂。&lt;/text&gt;&#13;&#10;            &lt;text x='64' y='684' fontSize='13' fill='#8A9AAA' fontFamily='Microsoft YaHei'&gt;Python 讲授课件 · 逐节版&lt;/text&gt;&#13;&#10;            &lt;text x='1216' y='684' fontSize='13' fill='#8A9AAA' textAnchor='end' fontFamily='Microsoft YaHei'&gt;单元 21 · 第 111 节&lt;/text&gt;&#13;&#10;        &lt;/svg&gt;&#13;&#10;    &lt;/Box&gt;&#13;&#10;&lt;/Slide&gt;&#13;&#10;"/>
         <p:cNvGrpSpPr/>
         <p:nvPr/>
       </p:nvGrpSpPr>

--- a/python-course-ppt/逐节课件/Python讲授课件-单元21.pptx
+++ b/python-course-ppt/逐节课件/Python讲授课件-单元21.pptx
@@ -234,6 +234,1038 @@
     </a:lvl9pPr>
   </p:notesStyle>
 </p:notesMaster>
+</file>
+
+<file path=ppt/notesSlides/notesSlide1.xml><?xml version="1.0" encoding="utf-8"?>
+<p:notes xmlns:a="http://schemas.openxmlformats.org/drawingml/2006/main" xmlns:p="http://schemas.openxmlformats.org/presentationml/2006/main" xmlns:r="http://schemas.openxmlformats.org/officeDocument/2006/relationships">
+  <p:cSld>
+    <p:spTree>
+      <p:nvGrpSpPr>
+        <p:cNvPr id="1" name=""/>
+        <p:cNvGrpSpPr/>
+        <p:nvPr/>
+      </p:nvGrpSpPr>
+      <p:grpSpPr>
+        <a:xfrm>
+          <a:off x="0" y="0"/>
+          <a:ext cx="0" cy="0"/>
+          <a:chOff x="0" y="0"/>
+          <a:chExt cx="0" cy="0"/>
+        </a:xfrm>
+      </p:grpSpPr>
+      <p:sp>
+        <p:nvSpPr>
+          <p:cNvPr id="2" name="讲课提示"/>
+          <p:cNvSpPr txBox="1"/>
+          <p:nvPr/>
+        </p:nvSpPr>
+        <p:spPr>
+          <a:xfrm>
+            <a:off x="457200" y="457200"/>
+            <a:ext cx="6858000" cy="4800600"/>
+          </a:xfrm>
+          <a:prstGeom prst="rect">
+            <a:avLst/>
+          </a:prstGeom>
+        </p:spPr>
+        <p:txBody>
+          <a:bodyPr wrap="square"/>
+          <a:lstStyle/>
+          <a:p>
+            <a:r>
+              <a:rPr lang="zh-CN" dirty="0"/>
+              <a:t>单元 21 · 单元 21 · 阶段 2 综合 + 关卡 2 验收</a:t>
+            </a:r>
+          </a:p>
+          <a:p>
+            <a:r>
+              <a:rPr lang="zh-CN" dirty="0"/>
+              <a:t/>
+            </a:r>
+          </a:p>
+          <a:p>
+            <a:r>
+              <a:rPr lang="zh-CN" dirty="0"/>
+              <a:t>本单元包含以下课节：</a:t>
+            </a:r>
+          </a:p>
+          <a:p>
+            <a:r>
+              <a:rPr lang="zh-CN" dirty="0"/>
+              <a:t>· 第 108 节 工程流程回顾与技术地图</a:t>
+            </a:r>
+          </a:p>
+          <a:p>
+            <a:r>
+              <a:rPr lang="zh-CN" dirty="0"/>
+              <a:t>· 第 109 节 能力跃迁与工程问题速查</a:t>
+            </a:r>
+          </a:p>
+          <a:p>
+            <a:r>
+              <a:rPr lang="zh-CN" dirty="0"/>
+              <a:t>· 第 110 节 ★ 关卡 2 五项逐条自测</a:t>
+            </a:r>
+          </a:p>
+          <a:p>
+            <a:r>
+              <a:rPr lang="zh-CN" dirty="0"/>
+              <a:t>· 第 111 节 综合项目与阶段 2 收尾</a:t>
+            </a:r>
+          </a:p>
+          <a:p>
+            <a:r>
+              <a:rPr lang="zh-CN" dirty="0"/>
+              <a:t/>
+            </a:r>
+          </a:p>
+          <a:p>
+            <a:r>
+              <a:rPr lang="zh-CN" dirty="0"/>
+              <a:t>开场用 3 分钟讲清：这个单元学完能做出什么，最后会被关卡怎么验。</a:t>
+            </a:r>
+          </a:p>
+        </p:txBody>
+      </p:sp>
+    </p:spTree>
+  </p:cSld>
+  <p:clrMapOvr>
+    <a:masterClrMapping/>
+  </p:clrMapOvr>
+</p:notes>
+</file>
+
+<file path=ppt/notesSlides/notesSlide10.xml><?xml version="1.0" encoding="utf-8"?>
+<p:notes xmlns:a="http://schemas.openxmlformats.org/drawingml/2006/main" xmlns:p="http://schemas.openxmlformats.org/presentationml/2006/main" xmlns:r="http://schemas.openxmlformats.org/officeDocument/2006/relationships">
+  <p:cSld>
+    <p:spTree>
+      <p:nvGrpSpPr>
+        <p:cNvPr id="1" name=""/>
+        <p:cNvGrpSpPr/>
+        <p:nvPr/>
+      </p:nvGrpSpPr>
+      <p:grpSpPr>
+        <a:xfrm>
+          <a:off x="0" y="0"/>
+          <a:ext cx="0" cy="0"/>
+          <a:chOff x="0" y="0"/>
+          <a:chExt cx="0" cy="0"/>
+        </a:xfrm>
+      </p:grpSpPr>
+      <p:sp>
+        <p:nvSpPr>
+          <p:cNvPr id="2" name="讲课提示"/>
+          <p:cNvSpPr txBox="1"/>
+          <p:nvPr/>
+        </p:nvSpPr>
+        <p:spPr>
+          <a:xfrm>
+            <a:off x="457200" y="457200"/>
+            <a:ext cx="6858000" cy="4800600"/>
+          </a:xfrm>
+          <a:prstGeom prst="rect">
+            <a:avLst/>
+          </a:prstGeom>
+        </p:spPr>
+        <p:txBody>
+          <a:bodyPr wrap="square"/>
+          <a:lstStyle/>
+          <a:p>
+            <a:r>
+              <a:rPr lang="zh-CN" dirty="0"/>
+              <a:t>单元 21 小结 · 单元 21 · 小结</a:t>
+            </a:r>
+          </a:p>
+          <a:p>
+            <a:r>
+              <a:rPr lang="zh-CN" dirty="0"/>
+              <a:t/>
+            </a:r>
+          </a:p>
+          <a:p>
+            <a:r>
+              <a:rPr lang="zh-CN" dirty="0"/>
+              <a:t>收尾动作：让学生合上讲义，口述本单元三个最重要的结论；说不出来的，回对应课节。</a:t>
+            </a:r>
+          </a:p>
+          <a:p>
+            <a:r>
+              <a:rPr lang="zh-CN" dirty="0"/>
+              <a:t>然后当场勾一遍本单元课节的「已完成」，没打勾的进下一单元前补掉。</a:t>
+            </a:r>
+          </a:p>
+        </p:txBody>
+      </p:sp>
+    </p:spTree>
+  </p:cSld>
+  <p:clrMapOvr>
+    <a:masterClrMapping/>
+  </p:clrMapOvr>
+</p:notes>
+</file>
+
+<file path=ppt/notesSlides/notesSlide2.xml><?xml version="1.0" encoding="utf-8"?>
+<p:notes xmlns:a="http://schemas.openxmlformats.org/drawingml/2006/main" xmlns:p="http://schemas.openxmlformats.org/presentationml/2006/main" xmlns:r="http://schemas.openxmlformats.org/officeDocument/2006/relationships">
+  <p:cSld>
+    <p:spTree>
+      <p:nvGrpSpPr>
+        <p:cNvPr id="1" name=""/>
+        <p:cNvGrpSpPr/>
+        <p:nvPr/>
+      </p:nvGrpSpPr>
+      <p:grpSpPr>
+        <a:xfrm>
+          <a:off x="0" y="0"/>
+          <a:ext cx="0" cy="0"/>
+          <a:chOff x="0" y="0"/>
+          <a:chExt cx="0" cy="0"/>
+        </a:xfrm>
+      </p:grpSpPr>
+      <p:sp>
+        <p:nvSpPr>
+          <p:cNvPr id="2" name="讲课提示"/>
+          <p:cNvSpPr txBox="1"/>
+          <p:nvPr/>
+        </p:nvSpPr>
+        <p:spPr>
+          <a:xfrm>
+            <a:off x="457200" y="457200"/>
+            <a:ext cx="6858000" cy="4800600"/>
+          </a:xfrm>
+          <a:prstGeom prst="rect">
+            <a:avLst/>
+          </a:prstGeom>
+        </p:spPr>
+        <p:txBody>
+          <a:bodyPr wrap="square"/>
+          <a:lstStyle/>
+          <a:p>
+            <a:r>
+              <a:rPr lang="zh-CN" dirty="0"/>
+              <a:t>第 108 节 · 工程流程回顾与技术地图</a:t>
+            </a:r>
+          </a:p>
+          <a:p>
+            <a:r>
+              <a:rPr lang="zh-CN" dirty="0"/>
+              <a:t>单元 21 · 阶段 2 综合 + 关卡 2 验收 · W28</a:t>
+            </a:r>
+          </a:p>
+          <a:p>
+            <a:r>
+              <a:rPr lang="zh-CN" dirty="0"/>
+              <a:t/>
+            </a:r>
+          </a:p>
+          <a:p>
+            <a:r>
+              <a:rPr lang="zh-CN" dirty="0"/>
+              <a:t>学习目标：掌握「读需求 → 拆解 → 查文档 → 编码 → 提交 → README → 重构」七步流程</a:t>
+            </a:r>
+          </a:p>
+          <a:p>
+            <a:r>
+              <a:rPr lang="zh-CN" dirty="0"/>
+              <a:t/>
+            </a:r>
+          </a:p>
+          <a:p>
+            <a:r>
+              <a:rPr lang="zh-CN" dirty="0"/>
+              <a:t>课堂实操（40 分钟，不看答案）：</a:t>
+            </a:r>
+          </a:p>
+          <a:p>
+            <a:r>
+              <a:rPr lang="zh-CN" dirty="0"/>
+              <a:t>· 用七步流程复盘自己这三个项目各走了哪几步</a:t>
+            </a:r>
+          </a:p>
+          <a:p>
+            <a:r>
+              <a:rPr lang="zh-CN" dirty="0"/>
+              <a:t>· 给一个需求现场拆成步骤清单</a:t>
+            </a:r>
+          </a:p>
+          <a:p>
+            <a:r>
+              <a:rPr lang="zh-CN" dirty="0"/>
+              <a:t/>
+            </a:r>
+          </a:p>
+          <a:p>
+            <a:r>
+              <a:rPr lang="zh-CN" dirty="0"/>
+              <a:t>课后作业：</a:t>
+            </a:r>
+          </a:p>
+          <a:p>
+            <a:r>
+              <a:rPr lang="zh-CN" dirty="0"/>
+              <a:t>· 产出：三项目的工程流程自查表</a:t>
+            </a:r>
+          </a:p>
+          <a:p>
+            <a:r>
+              <a:rPr lang="zh-CN" dirty="0"/>
+              <a:t/>
+            </a:r>
+          </a:p>
+          <a:p>
+            <a:r>
+              <a:rPr lang="zh-CN" dirty="0"/>
+              <a:t>节奏：讲 20 分钟 → 学员自己敲 40 分钟（不看答案）→ 对讲评自查 20 分钟 → 写作业 10 分钟。</a:t>
+            </a:r>
+          </a:p>
+        </p:txBody>
+      </p:sp>
+    </p:spTree>
+  </p:cSld>
+  <p:clrMapOvr>
+    <a:masterClrMapping/>
+  </p:clrMapOvr>
+</p:notes>
+</file>
+
+<file path=ppt/notesSlides/notesSlide3.xml><?xml version="1.0" encoding="utf-8"?>
+<p:notes xmlns:a="http://schemas.openxmlformats.org/drawingml/2006/main" xmlns:p="http://schemas.openxmlformats.org/presentationml/2006/main" xmlns:r="http://schemas.openxmlformats.org/officeDocument/2006/relationships">
+  <p:cSld>
+    <p:spTree>
+      <p:nvGrpSpPr>
+        <p:cNvPr id="1" name=""/>
+        <p:cNvGrpSpPr/>
+        <p:nvPr/>
+      </p:nvGrpSpPr>
+      <p:grpSpPr>
+        <a:xfrm>
+          <a:off x="0" y="0"/>
+          <a:ext cx="0" cy="0"/>
+          <a:chOff x="0" y="0"/>
+          <a:chExt cx="0" cy="0"/>
+        </a:xfrm>
+      </p:grpSpPr>
+      <p:sp>
+        <p:nvSpPr>
+          <p:cNvPr id="2" name="讲课提示"/>
+          <p:cNvSpPr txBox="1"/>
+          <p:nvPr/>
+        </p:nvSpPr>
+        <p:spPr>
+          <a:xfrm>
+            <a:off x="457200" y="457200"/>
+            <a:ext cx="6858000" cy="4800600"/>
+          </a:xfrm>
+          <a:prstGeom prst="rect">
+            <a:avLst/>
+          </a:prstGeom>
+        </p:spPr>
+        <p:txBody>
+          <a:bodyPr wrap="square"/>
+          <a:lstStyle/>
+          <a:p>
+            <a:r>
+              <a:rPr lang="zh-CN" dirty="0"/>
+              <a:t>第 108 节 · 核心知识点：工程流程回顾与技术地图</a:t>
+            </a:r>
+          </a:p>
+          <a:p>
+            <a:r>
+              <a:rPr lang="zh-CN" dirty="0"/>
+              <a:t/>
+            </a:r>
+          </a:p>
+          <a:p>
+            <a:r>
+              <a:rPr lang="zh-CN" dirty="0"/>
+              <a:t>讲这一页时：先让学生说出上节课的结论，再逐块讲要点。</a:t>
+            </a:r>
+          </a:p>
+          <a:p>
+            <a:r>
+              <a:rPr lang="zh-CN" dirty="0"/>
+              <a:t>每讲完一块，问一句「这一步如果写错了，报错会长什么样？」——把错误提前讲。</a:t>
+            </a:r>
+          </a:p>
+          <a:p>
+            <a:r>
+              <a:rPr lang="zh-CN" dirty="0"/>
+              <a:t/>
+            </a:r>
+          </a:p>
+          <a:p>
+            <a:r>
+              <a:rPr lang="zh-CN" dirty="0"/>
+              <a:t>本节目标：掌握「读需求 → 拆解 → 查文档 → 编码 → 提交 → README → 重构」七步流程</a:t>
+            </a:r>
+          </a:p>
+          <a:p>
+            <a:r>
+              <a:rPr lang="zh-CN" dirty="0"/>
+              <a:t/>
+            </a:r>
+          </a:p>
+          <a:p>
+            <a:r>
+              <a:rPr lang="zh-CN" dirty="0"/>
+              <a:t>看不到懂的地方，回讲义对应小节读一遍，再回来对着这页复述一次——能讲出来才算真懂。</a:t>
+            </a:r>
+          </a:p>
+        </p:txBody>
+      </p:sp>
+    </p:spTree>
+  </p:cSld>
+  <p:clrMapOvr>
+    <a:masterClrMapping/>
+  </p:clrMapOvr>
+</p:notes>
+</file>
+
+<file path=ppt/notesSlides/notesSlide4.xml><?xml version="1.0" encoding="utf-8"?>
+<p:notes xmlns:a="http://schemas.openxmlformats.org/drawingml/2006/main" xmlns:p="http://schemas.openxmlformats.org/presentationml/2006/main" xmlns:r="http://schemas.openxmlformats.org/officeDocument/2006/relationships">
+  <p:cSld>
+    <p:spTree>
+      <p:nvGrpSpPr>
+        <p:cNvPr id="1" name=""/>
+        <p:cNvGrpSpPr/>
+        <p:nvPr/>
+      </p:nvGrpSpPr>
+      <p:grpSpPr>
+        <a:xfrm>
+          <a:off x="0" y="0"/>
+          <a:ext cx="0" cy="0"/>
+          <a:chOff x="0" y="0"/>
+          <a:chExt cx="0" cy="0"/>
+        </a:xfrm>
+      </p:grpSpPr>
+      <p:sp>
+        <p:nvSpPr>
+          <p:cNvPr id="2" name="讲课提示"/>
+          <p:cNvSpPr txBox="1"/>
+          <p:nvPr/>
+        </p:nvSpPr>
+        <p:spPr>
+          <a:xfrm>
+            <a:off x="457200" y="457200"/>
+            <a:ext cx="6858000" cy="4800600"/>
+          </a:xfrm>
+          <a:prstGeom prst="rect">
+            <a:avLst/>
+          </a:prstGeom>
+        </p:spPr>
+        <p:txBody>
+          <a:bodyPr wrap="square"/>
+          <a:lstStyle/>
+          <a:p>
+            <a:r>
+              <a:rPr lang="zh-CN" dirty="0"/>
+              <a:t>第 109 节 · 能力跃迁与工程问题速查</a:t>
+            </a:r>
+          </a:p>
+          <a:p>
+            <a:r>
+              <a:rPr lang="zh-CN" dirty="0"/>
+              <a:t>单元 21 · 阶段 2 综合 + 关卡 2 验收 · W28–W29</a:t>
+            </a:r>
+          </a:p>
+          <a:p>
+            <a:r>
+              <a:rPr lang="zh-CN" dirty="0"/>
+              <a:t/>
+            </a:r>
+          </a:p>
+          <a:p>
+            <a:r>
+              <a:rPr lang="zh-CN" dirty="0"/>
+              <a:t>学习目标：说清从脚本到项目的跃迁；会用 requirements.txt / .gitignore / 环境变量</a:t>
+            </a:r>
+          </a:p>
+          <a:p>
+            <a:r>
+              <a:rPr lang="zh-CN" dirty="0"/>
+              <a:t/>
+            </a:r>
+          </a:p>
+          <a:p>
+            <a:r>
+              <a:rPr lang="zh-CN" dirty="0"/>
+              <a:t>课堂实操（40 分钟，不看答案）：</a:t>
+            </a:r>
+          </a:p>
+          <a:p>
+            <a:r>
+              <a:rPr lang="zh-CN" dirty="0"/>
+              <a:t>· 给三个项目各跑一次「工程件体检」</a:t>
+            </a:r>
+          </a:p>
+          <a:p>
+            <a:r>
+              <a:rPr lang="zh-CN" dirty="0"/>
+              <a:t>· 把一个密钥从代码里挪到环境变量</a:t>
+            </a:r>
+          </a:p>
+          <a:p>
+            <a:r>
+              <a:rPr lang="zh-CN" dirty="0"/>
+              <a:t/>
+            </a:r>
+          </a:p>
+          <a:p>
+            <a:r>
+              <a:rPr lang="zh-CN" dirty="0"/>
+              <a:t>课后作业：</a:t>
+            </a:r>
+          </a:p>
+          <a:p>
+            <a:r>
+              <a:rPr lang="zh-CN" dirty="0"/>
+              <a:t>· 产出：三个项目的 README + requirements.txt</a:t>
+            </a:r>
+          </a:p>
+          <a:p>
+            <a:r>
+              <a:rPr lang="zh-CN" dirty="0"/>
+              <a:t/>
+            </a:r>
+          </a:p>
+          <a:p>
+            <a:r>
+              <a:rPr lang="zh-CN" dirty="0"/>
+              <a:t>节奏：讲 20 分钟 → 学员自己敲 40 分钟（不看答案）→ 对讲评自查 20 分钟 → 写作业 10 分钟。</a:t>
+            </a:r>
+          </a:p>
+        </p:txBody>
+      </p:sp>
+    </p:spTree>
+  </p:cSld>
+  <p:clrMapOvr>
+    <a:masterClrMapping/>
+  </p:clrMapOvr>
+</p:notes>
+</file>
+
+<file path=ppt/notesSlides/notesSlide5.xml><?xml version="1.0" encoding="utf-8"?>
+<p:notes xmlns:a="http://schemas.openxmlformats.org/drawingml/2006/main" xmlns:p="http://schemas.openxmlformats.org/presentationml/2006/main" xmlns:r="http://schemas.openxmlformats.org/officeDocument/2006/relationships">
+  <p:cSld>
+    <p:spTree>
+      <p:nvGrpSpPr>
+        <p:cNvPr id="1" name=""/>
+        <p:cNvGrpSpPr/>
+        <p:nvPr/>
+      </p:nvGrpSpPr>
+      <p:grpSpPr>
+        <a:xfrm>
+          <a:off x="0" y="0"/>
+          <a:ext cx="0" cy="0"/>
+          <a:chOff x="0" y="0"/>
+          <a:chExt cx="0" cy="0"/>
+        </a:xfrm>
+      </p:grpSpPr>
+      <p:sp>
+        <p:nvSpPr>
+          <p:cNvPr id="2" name="讲课提示"/>
+          <p:cNvSpPr txBox="1"/>
+          <p:nvPr/>
+        </p:nvSpPr>
+        <p:spPr>
+          <a:xfrm>
+            <a:off x="457200" y="457200"/>
+            <a:ext cx="6858000" cy="4800600"/>
+          </a:xfrm>
+          <a:prstGeom prst="rect">
+            <a:avLst/>
+          </a:prstGeom>
+        </p:spPr>
+        <p:txBody>
+          <a:bodyPr wrap="square"/>
+          <a:lstStyle/>
+          <a:p>
+            <a:r>
+              <a:rPr lang="zh-CN" dirty="0"/>
+              <a:t>第 109 节 · 核心知识点：能力跃迁与工程问题速查</a:t>
+            </a:r>
+          </a:p>
+          <a:p>
+            <a:r>
+              <a:rPr lang="zh-CN" dirty="0"/>
+              <a:t/>
+            </a:r>
+          </a:p>
+          <a:p>
+            <a:r>
+              <a:rPr lang="zh-CN" dirty="0"/>
+              <a:t>讲这一页时：先让学生说出上节课的结论，再逐块讲要点。</a:t>
+            </a:r>
+          </a:p>
+          <a:p>
+            <a:r>
+              <a:rPr lang="zh-CN" dirty="0"/>
+              <a:t>每讲完一块，问一句「这一步如果写错了，报错会长什么样？」——把错误提前讲。</a:t>
+            </a:r>
+          </a:p>
+          <a:p>
+            <a:r>
+              <a:rPr lang="zh-CN" dirty="0"/>
+              <a:t/>
+            </a:r>
+          </a:p>
+          <a:p>
+            <a:r>
+              <a:rPr lang="zh-CN" dirty="0"/>
+              <a:t>本节目标：说清从脚本到项目的跃迁；会用 requirements.txt / .gitignore / 环境变量</a:t>
+            </a:r>
+          </a:p>
+          <a:p>
+            <a:r>
+              <a:rPr lang="zh-CN" dirty="0"/>
+              <a:t/>
+            </a:r>
+          </a:p>
+          <a:p>
+            <a:r>
+              <a:rPr lang="zh-CN" dirty="0"/>
+              <a:t>看不到懂的地方，回讲义对应小节读一遍，再回来对着这页复述一次——能讲出来才算真懂。</a:t>
+            </a:r>
+          </a:p>
+        </p:txBody>
+      </p:sp>
+    </p:spTree>
+  </p:cSld>
+  <p:clrMapOvr>
+    <a:masterClrMapping/>
+  </p:clrMapOvr>
+</p:notes>
+</file>
+
+<file path=ppt/notesSlides/notesSlide6.xml><?xml version="1.0" encoding="utf-8"?>
+<p:notes xmlns:a="http://schemas.openxmlformats.org/drawingml/2006/main" xmlns:p="http://schemas.openxmlformats.org/presentationml/2006/main" xmlns:r="http://schemas.openxmlformats.org/officeDocument/2006/relationships">
+  <p:cSld>
+    <p:spTree>
+      <p:nvGrpSpPr>
+        <p:cNvPr id="1" name=""/>
+        <p:cNvGrpSpPr/>
+        <p:nvPr/>
+      </p:nvGrpSpPr>
+      <p:grpSpPr>
+        <a:xfrm>
+          <a:off x="0" y="0"/>
+          <a:ext cx="0" cy="0"/>
+          <a:chOff x="0" y="0"/>
+          <a:chExt cx="0" cy="0"/>
+        </a:xfrm>
+      </p:grpSpPr>
+      <p:sp>
+        <p:nvSpPr>
+          <p:cNvPr id="2" name="讲课提示"/>
+          <p:cNvSpPr txBox="1"/>
+          <p:nvPr/>
+        </p:nvSpPr>
+        <p:spPr>
+          <a:xfrm>
+            <a:off x="457200" y="457200"/>
+            <a:ext cx="6858000" cy="4800600"/>
+          </a:xfrm>
+          <a:prstGeom prst="rect">
+            <a:avLst/>
+          </a:prstGeom>
+        </p:spPr>
+        <p:txBody>
+          <a:bodyPr wrap="square"/>
+          <a:lstStyle/>
+          <a:p>
+            <a:r>
+              <a:rPr lang="zh-CN" dirty="0"/>
+              <a:t>第 110 节 · ★ 关卡 2 五项逐条自测</a:t>
+            </a:r>
+          </a:p>
+          <a:p>
+            <a:r>
+              <a:rPr lang="zh-CN" dirty="0"/>
+              <a:t>单元 21 · 阶段 2 综合 + 关卡 2 验收 · W29</a:t>
+            </a:r>
+          </a:p>
+          <a:p>
+            <a:r>
+              <a:rPr lang="zh-CN" dirty="0"/>
+              <a:t/>
+            </a:r>
+          </a:p>
+          <a:p>
+            <a:r>
+              <a:rPr lang="zh-CN" dirty="0"/>
+              <a:t>学习目标：限时自测五条硬指标，明确哪条没过、怎么补</a:t>
+            </a:r>
+          </a:p>
+          <a:p>
+            <a:r>
+              <a:rPr lang="zh-CN" dirty="0"/>
+              <a:t/>
+            </a:r>
+          </a:p>
+          <a:p>
+            <a:r>
+              <a:rPr lang="zh-CN" dirty="0"/>
+              <a:t>课堂实操（40 分钟，不看答案）：</a:t>
+            </a:r>
+          </a:p>
+          <a:p>
+            <a:r>
+              <a:rPr lang="zh-CN" dirty="0"/>
+              <a:t>· 逐条自测并记录结果</a:t>
+            </a:r>
+          </a:p>
+          <a:p>
+            <a:r>
+              <a:rPr lang="zh-CN" dirty="0"/>
+              <a:t>· 没过的项当场定补齐计划</a:t>
+            </a:r>
+          </a:p>
+          <a:p>
+            <a:r>
+              <a:rPr lang="zh-CN" dirty="0"/>
+              <a:t/>
+            </a:r>
+          </a:p>
+          <a:p>
+            <a:r>
+              <a:rPr lang="zh-CN" dirty="0"/>
+              <a:t>课后作业：</a:t>
+            </a:r>
+          </a:p>
+          <a:p>
+            <a:r>
+              <a:rPr lang="zh-CN" dirty="0"/>
+              <a:t>· ★ 关卡 2 五项逐条自测</a:t>
+            </a:r>
+          </a:p>
+          <a:p>
+            <a:r>
+              <a:rPr lang="zh-CN" dirty="0"/>
+              <a:t/>
+            </a:r>
+          </a:p>
+          <a:p>
+            <a:r>
+              <a:rPr lang="zh-CN" dirty="0"/>
+              <a:t>节奏：讲 20 分钟 → 学员自己敲 40 分钟（不看答案）→ 对讲评自查 20 分钟 → 写作业 10 分钟。</a:t>
+            </a:r>
+          </a:p>
+        </p:txBody>
+      </p:sp>
+    </p:spTree>
+  </p:cSld>
+  <p:clrMapOvr>
+    <a:masterClrMapping/>
+  </p:clrMapOvr>
+</p:notes>
+</file>
+
+<file path=ppt/notesSlides/notesSlide7.xml><?xml version="1.0" encoding="utf-8"?>
+<p:notes xmlns:a="http://schemas.openxmlformats.org/drawingml/2006/main" xmlns:p="http://schemas.openxmlformats.org/presentationml/2006/main" xmlns:r="http://schemas.openxmlformats.org/officeDocument/2006/relationships">
+  <p:cSld>
+    <p:spTree>
+      <p:nvGrpSpPr>
+        <p:cNvPr id="1" name=""/>
+        <p:cNvGrpSpPr/>
+        <p:nvPr/>
+      </p:nvGrpSpPr>
+      <p:grpSpPr>
+        <a:xfrm>
+          <a:off x="0" y="0"/>
+          <a:ext cx="0" cy="0"/>
+          <a:chOff x="0" y="0"/>
+          <a:chExt cx="0" cy="0"/>
+        </a:xfrm>
+      </p:grpSpPr>
+      <p:sp>
+        <p:nvSpPr>
+          <p:cNvPr id="2" name="讲课提示"/>
+          <p:cNvSpPr txBox="1"/>
+          <p:nvPr/>
+        </p:nvSpPr>
+        <p:spPr>
+          <a:xfrm>
+            <a:off x="457200" y="457200"/>
+            <a:ext cx="6858000" cy="4800600"/>
+          </a:xfrm>
+          <a:prstGeom prst="rect">
+            <a:avLst/>
+          </a:prstGeom>
+        </p:spPr>
+        <p:txBody>
+          <a:bodyPr wrap="square"/>
+          <a:lstStyle/>
+          <a:p>
+            <a:r>
+              <a:rPr lang="zh-CN" dirty="0"/>
+              <a:t>第 110 节 · 核心知识点：★ 关卡 2 五项逐条自测</a:t>
+            </a:r>
+          </a:p>
+          <a:p>
+            <a:r>
+              <a:rPr lang="zh-CN" dirty="0"/>
+              <a:t/>
+            </a:r>
+          </a:p>
+          <a:p>
+            <a:r>
+              <a:rPr lang="zh-CN" dirty="0"/>
+              <a:t>讲这一页时：先让学生说出上节课的结论，再逐块讲要点。</a:t>
+            </a:r>
+          </a:p>
+          <a:p>
+            <a:r>
+              <a:rPr lang="zh-CN" dirty="0"/>
+              <a:t>每讲完一块，问一句「这一步如果写错了，报错会长什么样？」——把错误提前讲。</a:t>
+            </a:r>
+          </a:p>
+          <a:p>
+            <a:r>
+              <a:rPr lang="zh-CN" dirty="0"/>
+              <a:t/>
+            </a:r>
+          </a:p>
+          <a:p>
+            <a:r>
+              <a:rPr lang="zh-CN" dirty="0"/>
+              <a:t>本节目标：限时自测五条硬指标，明确哪条没过、怎么补</a:t>
+            </a:r>
+          </a:p>
+          <a:p>
+            <a:r>
+              <a:rPr lang="zh-CN" dirty="0"/>
+              <a:t/>
+            </a:r>
+          </a:p>
+          <a:p>
+            <a:r>
+              <a:rPr lang="zh-CN" dirty="0"/>
+              <a:t>看不到懂的地方，回讲义对应小节读一遍，再回来对着这页复述一次——能讲出来才算真懂。</a:t>
+            </a:r>
+          </a:p>
+        </p:txBody>
+      </p:sp>
+    </p:spTree>
+  </p:cSld>
+  <p:clrMapOvr>
+    <a:masterClrMapping/>
+  </p:clrMapOvr>
+</p:notes>
+</file>
+
+<file path=ppt/notesSlides/notesSlide8.xml><?xml version="1.0" encoding="utf-8"?>
+<p:notes xmlns:a="http://schemas.openxmlformats.org/drawingml/2006/main" xmlns:p="http://schemas.openxmlformats.org/presentationml/2006/main" xmlns:r="http://schemas.openxmlformats.org/officeDocument/2006/relationships">
+  <p:cSld>
+    <p:spTree>
+      <p:nvGrpSpPr>
+        <p:cNvPr id="1" name=""/>
+        <p:cNvGrpSpPr/>
+        <p:nvPr/>
+      </p:nvGrpSpPr>
+      <p:grpSpPr>
+        <a:xfrm>
+          <a:off x="0" y="0"/>
+          <a:ext cx="0" cy="0"/>
+          <a:chOff x="0" y="0"/>
+          <a:chExt cx="0" cy="0"/>
+        </a:xfrm>
+      </p:grpSpPr>
+      <p:sp>
+        <p:nvSpPr>
+          <p:cNvPr id="2" name="讲课提示"/>
+          <p:cNvSpPr txBox="1"/>
+          <p:nvPr/>
+        </p:nvSpPr>
+        <p:spPr>
+          <a:xfrm>
+            <a:off x="457200" y="457200"/>
+            <a:ext cx="6858000" cy="4800600"/>
+          </a:xfrm>
+          <a:prstGeom prst="rect">
+            <a:avLst/>
+          </a:prstGeom>
+        </p:spPr>
+        <p:txBody>
+          <a:bodyPr wrap="square"/>
+          <a:lstStyle/>
+          <a:p>
+            <a:r>
+              <a:rPr lang="zh-CN" dirty="0"/>
+              <a:t>第 111 节 · 综合项目与阶段 2 收尾</a:t>
+            </a:r>
+          </a:p>
+          <a:p>
+            <a:r>
+              <a:rPr lang="zh-CN" dirty="0"/>
+              <a:t>单元 21 · 阶段 2 综合 + 关卡 2 验收 · W29</a:t>
+            </a:r>
+          </a:p>
+          <a:p>
+            <a:r>
+              <a:rPr lang="zh-CN" dirty="0"/>
+              <a:t/>
+            </a:r>
+          </a:p>
+          <a:p>
+            <a:r>
+              <a:rPr lang="zh-CN" dirty="0"/>
+              <a:t>学习目标：任选一个综合项目做完，形成阶段 2 的收尾产出</a:t>
+            </a:r>
+          </a:p>
+          <a:p>
+            <a:r>
+              <a:rPr lang="zh-CN" dirty="0"/>
+              <a:t/>
+            </a:r>
+          </a:p>
+          <a:p>
+            <a:r>
+              <a:rPr lang="zh-CN" dirty="0"/>
+              <a:t>课堂实操（40 分钟，不看答案）：</a:t>
+            </a:r>
+          </a:p>
+          <a:p>
+            <a:r>
+              <a:rPr lang="zh-CN" dirty="0"/>
+              <a:t>· 任选 A/B/C 之一定题并开工</a:t>
+            </a:r>
+          </a:p>
+          <a:p>
+            <a:r>
+              <a:rPr lang="zh-CN" dirty="0"/>
+              <a:t>· 对照统一要求自查四条</a:t>
+            </a:r>
+          </a:p>
+          <a:p>
+            <a:r>
+              <a:rPr lang="zh-CN" dirty="0"/>
+              <a:t/>
+            </a:r>
+          </a:p>
+          <a:p>
+            <a:r>
+              <a:rPr lang="zh-CN" dirty="0"/>
+              <a:t>课后作业：</a:t>
+            </a:r>
+          </a:p>
+          <a:p>
+            <a:r>
+              <a:rPr lang="zh-CN" dirty="0"/>
+              <a:t>· ★ 产出：一个可展示的综合项目 + 阶段 1 学习总结</a:t>
+            </a:r>
+          </a:p>
+          <a:p>
+            <a:r>
+              <a:rPr lang="zh-CN" dirty="0"/>
+              <a:t/>
+            </a:r>
+          </a:p>
+          <a:p>
+            <a:r>
+              <a:rPr lang="zh-CN" dirty="0"/>
+              <a:t>节奏：讲 20 分钟 → 学员自己敲 40 分钟（不看答案）→ 对讲评自查 20 分钟 → 写作业 10 分钟。</a:t>
+            </a:r>
+          </a:p>
+        </p:txBody>
+      </p:sp>
+    </p:spTree>
+  </p:cSld>
+  <p:clrMapOvr>
+    <a:masterClrMapping/>
+  </p:clrMapOvr>
+</p:notes>
+</file>
+
+<file path=ppt/notesSlides/notesSlide9.xml><?xml version="1.0" encoding="utf-8"?>
+<p:notes xmlns:a="http://schemas.openxmlformats.org/drawingml/2006/main" xmlns:p="http://schemas.openxmlformats.org/presentationml/2006/main" xmlns:r="http://schemas.openxmlformats.org/officeDocument/2006/relationships">
+  <p:cSld>
+    <p:spTree>
+      <p:nvGrpSpPr>
+        <p:cNvPr id="1" name=""/>
+        <p:cNvGrpSpPr/>
+        <p:nvPr/>
+      </p:nvGrpSpPr>
+      <p:grpSpPr>
+        <a:xfrm>
+          <a:off x="0" y="0"/>
+          <a:ext cx="0" cy="0"/>
+          <a:chOff x="0" y="0"/>
+          <a:chExt cx="0" cy="0"/>
+        </a:xfrm>
+      </p:grpSpPr>
+      <p:sp>
+        <p:nvSpPr>
+          <p:cNvPr id="2" name="讲课提示"/>
+          <p:cNvSpPr txBox="1"/>
+          <p:nvPr/>
+        </p:nvSpPr>
+        <p:spPr>
+          <a:xfrm>
+            <a:off x="457200" y="457200"/>
+            <a:ext cx="6858000" cy="4800600"/>
+          </a:xfrm>
+          <a:prstGeom prst="rect">
+            <a:avLst/>
+          </a:prstGeom>
+        </p:spPr>
+        <p:txBody>
+          <a:bodyPr wrap="square"/>
+          <a:lstStyle/>
+          <a:p>
+            <a:r>
+              <a:rPr lang="zh-CN" dirty="0"/>
+              <a:t>第 111 节 · 核心知识点：综合项目与阶段 2 收尾</a:t>
+            </a:r>
+          </a:p>
+          <a:p>
+            <a:r>
+              <a:rPr lang="zh-CN" dirty="0"/>
+              <a:t/>
+            </a:r>
+          </a:p>
+          <a:p>
+            <a:r>
+              <a:rPr lang="zh-CN" dirty="0"/>
+              <a:t>讲这一页时：先让学生说出上节课的结论，再逐块讲要点。</a:t>
+            </a:r>
+          </a:p>
+          <a:p>
+            <a:r>
+              <a:rPr lang="zh-CN" dirty="0"/>
+              <a:t>每讲完一块，问一句「这一步如果写错了，报错会长什么样？」——把错误提前讲。</a:t>
+            </a:r>
+          </a:p>
+          <a:p>
+            <a:r>
+              <a:rPr lang="zh-CN" dirty="0"/>
+              <a:t/>
+            </a:r>
+          </a:p>
+          <a:p>
+            <a:r>
+              <a:rPr lang="zh-CN" dirty="0"/>
+              <a:t>本节目标：任选一个综合项目做完，形成阶段 2 的收尾产出</a:t>
+            </a:r>
+          </a:p>
+          <a:p>
+            <a:r>
+              <a:rPr lang="zh-CN" dirty="0"/>
+              <a:t/>
+            </a:r>
+          </a:p>
+          <a:p>
+            <a:r>
+              <a:rPr lang="zh-CN" dirty="0"/>
+              <a:t>看不到懂的地方，回讲义对应小节读一遍，再回来对着这页复述一次——能讲出来才算真懂。</a:t>
+            </a:r>
+          </a:p>
+        </p:txBody>
+      </p:sp>
+    </p:spTree>
+  </p:cSld>
+  <p:clrMapOvr>
+    <a:masterClrMapping/>
+  </p:clrMapOvr>
+</p:notes>
 </file>
 
 <file path=ppt/slideLayouts/slideLayout1.xml><?xml version="1.0" encoding="utf-8"?>
